--- a/Lessons/08_unsupervised_learning/Slides/unsupervised_learning_slides.pptx
+++ b/Lessons/08_unsupervised_learning/Slides/unsupervised_learning_slides.pptx
@@ -585,21 +585,21 @@
             </a:pPr>
             <a:r>
               <a:rPr/>
-              <a:t>Frame the whole lesson before the first slide of content. Every method met so far in this course — regression, logistic regression, trees, ensembles — learned from pairs: an input and a target. Today removes the target entirely. The task changes from “predict the label” to “describe the structure”: which points look alike, which few numbers summarise the many, which points do not belong.</a:t>
-            </a:r>
-          </a:p>
-          <a:p>
-            <a:pPr lvl="0" indent="0" marL="0">
-              <a:buNone/>
-            </a:pPr>
-          </a:p>
-          <a:p>
-            <a:pPr lvl="0" indent="0" marL="0">
-              <a:buNone/>
-            </a:pPr>
-            <a:r>
-              <a:rPr/>
-              <a:t>Say the running example once, up front: a fictional retailer, Aurora, and three of its actual questions, one per notebook — segmenting customers, telling bots from humans, and catching disguised fraud. None of the three has a y supplied by anyone.</a:t>
+              <a:t>Frame the whole lesson before the first slide of content. Every method met so far in this course - regression, logistic regression, trees, ensembles - learned from pairs: an input and a target. Today removes the target entirely. The task changes from “predict the label” to “describe the structure”: which points look alike, which few numbers summarise the many, which points do not belong.</a:t>
+            </a:r>
+          </a:p>
+          <a:p>
+            <a:pPr lvl="0" indent="0" marL="0">
+              <a:buNone/>
+            </a:pPr>
+          </a:p>
+          <a:p>
+            <a:pPr lvl="0" indent="0" marL="0">
+              <a:buNone/>
+            </a:pPr>
+            <a:r>
+              <a:rPr/>
+              <a:t>Say the running example once, up front: a fictional retailer, Aurora, and three of its actual questions, one per notebook - segmenting customers, telling bots from humans, and catching disguised fraud. None of the three has a y supplied by anyone.</a:t>
             </a:r>
           </a:p>
           <a:p>
@@ -695,7 +695,7 @@
             </a:pPr>
             <a:r>
               <a:rPr/>
-              <a:t>Both steps are genuinely exact, not heuristic approximations — worth stressing, since students have just spent two lessons on gradient descent, where every step is approximate. Here, each half of the alternation solves its half of the problem exactly: nearest-centre assignment is provably optimal given fixed centres, and the mean is provably optimal given a fixed assignment.</a:t>
+              <a:t>Both steps are genuinely exact, not heuristic approximations - worth stressing, since students have just spent two lessons on gradient descent, where every step is approximate. Here, each half of the alternation solves its half of the problem exactly: nearest-centre assignment is provably optimal given fixed centres, and the mean is provably optimal given a fixed assignment.</a:t>
             </a:r>
           </a:p>
           <a:p>
@@ -805,21 +805,21 @@
             </a:pPr>
             <a:r>
               <a:rPr/>
-              <a:t>This is the argument for why Lloyd’s algorithm terminates at all, and it is worth giving in full even though it is not a derivation of a formula — it is three short facts (non-increasing, bounded below, finitely many partitions) chained together, and it is the kind of argument students will meet again.</a:t>
-            </a:r>
-          </a:p>
-          <a:p>
-            <a:pPr lvl="0" indent="0" marL="0">
-              <a:buNone/>
-            </a:pPr>
-          </a:p>
-          <a:p>
-            <a:pPr lvl="0" indent="0" marL="0">
-              <a:buNone/>
-            </a:pPr>
-            <a:r>
-              <a:rPr/>
-              <a:t>The sting is in the last bullet. Converged does not mean correct — it means stuck, possibly at a bad local minimum. That is exactly what the next few slides measure.</a:t>
+              <a:t>This is the argument for why Lloyd’s algorithm terminates at all, and it is worth giving in full even though it is not a derivation of a formula - it is three short facts (non-increasing, bounded below, finitely many partitions) chained together, and it is the kind of argument students will meet again.</a:t>
+            </a:r>
+          </a:p>
+          <a:p>
+            <a:pPr lvl="0" indent="0" marL="0">
+              <a:buNone/>
+            </a:pPr>
+          </a:p>
+          <a:p>
+            <a:pPr lvl="0" indent="0" marL="0">
+              <a:buNone/>
+            </a:pPr>
+            <a:r>
+              <a:rPr/>
+              <a:t>The sting is in the last bullet. Converged does not mean correct - it means stuck, possibly at a bad local minimum. That is exactly what the next few slides measure.</a:t>
             </a:r>
           </a:p>
           <a:p>
@@ -915,21 +915,21 @@
             </a:pPr>
             <a:r>
               <a:rPr/>
-              <a:t>Six standardised customers, two deliberately bad initial centres — the first two points in the dataset. Walk the WCSS column: 15.965, 7.281, 5.491, 4.674 — falling at every single step, exactly as the previous slide argued it must.</a:t>
-            </a:r>
-          </a:p>
-          <a:p>
-            <a:pPr lvl="0" indent="0" marL="0">
-              <a:buNone/>
-            </a:pPr>
-          </a:p>
-          <a:p>
-            <a:pPr lvl="0" indent="0" marL="0">
-              <a:buNone/>
-            </a:pPr>
-            <a:r>
-              <a:rPr/>
-              <a:t>By iteration 2 the assignment repeats and both steps leave J unchanged: converged. In this particular six-point case it happens to be the global optimum — say clearly that this is a property of this small example, not a guarantee, since section 2.2 is about exactly the case where it is not.</a:t>
+              <a:t>Six standardised customers, two deliberately bad initial centres - the first two points in the dataset. Walk the WCSS column: 15.965, 7.281, 5.491, 4.674 - falling at every single step, exactly as the previous slide argued it must.</a:t>
+            </a:r>
+          </a:p>
+          <a:p>
+            <a:pPr lvl="0" indent="0" marL="0">
+              <a:buNone/>
+            </a:pPr>
+          </a:p>
+          <a:p>
+            <a:pPr lvl="0" indent="0" marL="0">
+              <a:buNone/>
+            </a:pPr>
+            <a:r>
+              <a:rPr/>
+              <a:t>By iteration 2 the assignment repeats and both steps leave J unchanged: converged. In this particular six-point case it happens to be the global optimum - say clearly that this is a property of this small example, not a guarantee, since section 2.2 is about exactly the case where it is not.</a:t>
             </a:r>
           </a:p>
           <a:p>
@@ -1041,21 +1041,21 @@
             </a:pPr>
             <a:r>
               <a:rPr/>
-              <a:t>Land the number, then the framing. Nothing about the update rule changed between the best run and the worst — only where the search started. That is the entire content of “local, not global minimum” made concrete.</a:t>
-            </a:r>
-          </a:p>
-          <a:p>
-            <a:pPr lvl="0" indent="0" marL="0">
-              <a:buNone/>
-            </a:pPr>
-          </a:p>
-          <a:p>
-            <a:pPr lvl="0" indent="0" marL="0">
-              <a:buNone/>
-            </a:pPr>
-            <a:r>
-              <a:rPr/>
-              <a:t>Ask the room: if you ran this once, on real data, with no truth to check against, how would you know which kind of run you got? You would not — the WCSS value alone does not distinguish a global optimum from a mediocre local one, because you have no reference point.</a:t>
+              <a:t>Land the number, then the framing. Nothing about the update rule changed between the best run and the worst - only where the search started. That is the entire content of “local, not global minimum” made concrete.</a:t>
+            </a:r>
+          </a:p>
+          <a:p>
+            <a:pPr lvl="0" indent="0" marL="0">
+              <a:buNone/>
+            </a:pPr>
+          </a:p>
+          <a:p>
+            <a:pPr lvl="0" indent="0" marL="0">
+              <a:buNone/>
+            </a:pPr>
+            <a:r>
+              <a:rPr/>
+              <a:t>Ask the room: if you ran this once, on real data, with no truth to check against, how would you know which kind of run you got? You would not - the WCSS value alone does not distinguish a global optimum from a mediocre local one, because you have no reference point.</a:t>
             </a:r>
           </a:p>
           <a:p>
@@ -1151,21 +1151,21 @@
             </a:pPr>
             <a:r>
               <a:rPr/>
-              <a:t>Say the rule in words first: the first centre is a uniformly random point; every centre after that is picked with probability proportional to its squared distance from the nearest centre already chosen. A point already close to an existing centre is unlikely to be picked again; a point far from everything picked so far — plausibly the seed of an as-yet-unrepresented cluster — is favoured.</a:t>
-            </a:r>
-          </a:p>
-          <a:p>
-            <a:pPr lvl="0" indent="0" marL="0">
-              <a:buNone/>
-            </a:pPr>
-          </a:p>
-          <a:p>
-            <a:pPr lvl="0" indent="0" marL="0">
-              <a:buNone/>
-            </a:pPr>
-            <a:r>
-              <a:rPr/>
-              <a:t>This is initialisation only — Lloyd’s algorithm afterward is completely unchanged. It addresses exactly the risk on the previous slide, by making a bad draw of starting centres much less likely.</a:t>
+              <a:t>Say the rule in words first: the first centre is a uniformly random point; every centre after that is picked with probability proportional to its squared distance from the nearest centre already chosen. A point already close to an existing centre is unlikely to be picked again; a point far from everything picked so far - plausibly the seed of an as-yet-unrepresented cluster - is favoured.</a:t>
+            </a:r>
+          </a:p>
+          <a:p>
+            <a:pPr lvl="0" indent="0" marL="0">
+              <a:buNone/>
+            </a:pPr>
+          </a:p>
+          <a:p>
+            <a:pPr lvl="0" indent="0" marL="0">
+              <a:buNone/>
+            </a:pPr>
+            <a:r>
+              <a:rPr/>
+              <a:t>This is initialisation only - Lloyd’s algorithm afterward is completely unchanged. It addresses exactly the risk on the previous slide, by making a bad draw of starting centres much less likely.</a:t>
             </a:r>
           </a:p>
           <a:p>
@@ -1261,21 +1261,21 @@
             </a:pPr>
             <a:r>
               <a:rPr/>
-              <a:t>Read the range change against the previous slide’s 374.1–1,390.4 — narrower, and reaching the optimum immediately rather than only sometimes. This is why k-means++ is the library default rather than an optional extra.</a:t>
-            </a:r>
-          </a:p>
-          <a:p>
-            <a:pPr lvl="0" indent="0" marL="0">
-              <a:buNone/>
-            </a:pPr>
-          </a:p>
-          <a:p>
-            <a:pPr lvl="0" indent="0" marL="0">
-              <a:buNone/>
-            </a:pPr>
-            <a:r>
-              <a:rPr/>
-              <a:t>The 10⁻⁴ agreement is worth naming explicitly as a genuine check, not an assumption — the from-scratch and scikit-learn implementations are searching for the same optimum from starts drawn the same way, and the notebook confirms it rather than takes it on faith.</a:t>
+              <a:t>Read the range change against the previous slide’s 374.1–1,390.4 - narrower, and reaching the optimum immediately rather than only sometimes. This is why k-means++ is the library default rather than an optional extra.</a:t>
+            </a:r>
+          </a:p>
+          <a:p>
+            <a:pPr lvl="0" indent="0" marL="0">
+              <a:buNone/>
+            </a:pPr>
+          </a:p>
+          <a:p>
+            <a:pPr lvl="0" indent="0" marL="0">
+              <a:buNone/>
+            </a:pPr>
+            <a:r>
+              <a:rPr/>
+              <a:t>The 10⁻⁴ agreement is worth naming explicitly as a genuine check, not an assumption - the from-scratch and scikit-learn implementations are searching for the same optimum from starts drawn the same way, and the notebook confirms it rather than takes it on faith.</a:t>
             </a:r>
           </a:p>
           <a:p>
@@ -1385,7 +1385,7 @@
             </a:pPr>
             <a:r>
               <a:rPr/>
-              <a:t>The elbow logic is a shape argument, not a threshold — ask the room how they would describe “where the curve stops falling steeply” precisely enough to automate it. The honest answer is that it is somewhat subjective, which motivates a second, more quantitative diagnostic on the next slide.</a:t>
+              <a:t>The elbow logic is a shape argument, not a threshold - ask the room how they would describe “where the curve stops falling steeply” precisely enough to automate it. The honest answer is that it is somewhat subjective, which motivates a second, more quantitative diagnostic on the next slide.</a:t>
             </a:r>
           </a:p>
           <a:p>
@@ -1577,21 +1577,21 @@
             </a:pPr>
             <a:r>
               <a:rPr/>
-              <a:t>Walk the three regimes: sᵢ → 1 when a point sits deep inside its own cluster and far from every other; sᵢ ≈ 0 on a boundary between two clusters; sᵢ &lt; 0 when a point is, on average, closer to a different cluster than its own — an assignment the silhouette treats as actively wrong.</a:t>
-            </a:r>
-          </a:p>
-          <a:p>
-            <a:pPr lvl="0" indent="0" marL="0">
-              <a:buNone/>
-            </a:pPr>
-          </a:p>
-          <a:p>
-            <a:pPr lvl="0" indent="0" marL="0">
-              <a:buNone/>
-            </a:pPr>
-            <a:r>
-              <a:rPr/>
-              <a:t>Averaged over all points, this gives one number per k that is a genuine quantity to search over, not only a shape to eyeball — a sharper diagnostic than the elbow, and one that measures something related but not identical: whether every point sits closer to its own group than to any rival.</a:t>
+              <a:t>Walk the three regimes: sᵢ → 1 when a point sits deep inside its own cluster and far from every other; sᵢ ≈ 0 on a boundary between two clusters; sᵢ &lt; 0 when a point is, on average, closer to a different cluster than its own - an assignment the silhouette treats as actively wrong.</a:t>
+            </a:r>
+          </a:p>
+          <a:p>
+            <a:pPr lvl="0" indent="0" marL="0">
+              <a:buNone/>
+            </a:pPr>
+          </a:p>
+          <a:p>
+            <a:pPr lvl="0" indent="0" marL="0">
+              <a:buNone/>
+            </a:pPr>
+            <a:r>
+              <a:rPr/>
+              <a:t>Averaged over all points, this gives one number per k that is a genuine quantity to search over, not only a shape to eyeball - a sharper diagnostic than the elbow, and one that measures something related but not identical: whether every point sits closer to its own group than to any rival.</a:t>
             </a:r>
           </a:p>
           <a:p>
@@ -1687,21 +1687,21 @@
             </a:pPr>
             <a:r>
               <a:rPr/>
-              <a:t>WCSS falls sharply through k=4 and flattens after; silhouette peaks at k=4 and then declines. Point out that the two curves are answering different questions — WCSS asks only “does adding a cluster help,” which is agnostic to what a cluster means; silhouette asks whether every point is closer to its own group than to any rival, a stronger, more geometric condition.</a:t>
-            </a:r>
-          </a:p>
-          <a:p>
-            <a:pPr lvl="0" indent="0" marL="0">
-              <a:buNone/>
-            </a:pPr>
-          </a:p>
-          <a:p>
-            <a:pPr lvl="0" indent="0" marL="0">
-              <a:buNone/>
-            </a:pPr>
-            <a:r>
-              <a:rPr/>
-              <a:t>Say plainly that the two diagnostics agreeing here is a property of this dataset’s four well-separated, comparably sized blobs — not a guarantee. Section 4 of the handout returns to a dataset where a diagnostic can be confidently wrong.</a:t>
+              <a:t>WCSS falls sharply through k=4 and flattens after; silhouette peaks at k=4 and then declines. Point out that the two curves are answering different questions - WCSS asks only “does adding a cluster help,” which is agnostic to what a cluster means; silhouette asks whether every point is closer to its own group than to any rival, a stronger, more geometric condition.</a:t>
+            </a:r>
+          </a:p>
+          <a:p>
+            <a:pPr lvl="0" indent="0" marL="0">
+              <a:buNone/>
+            </a:pPr>
+          </a:p>
+          <a:p>
+            <a:pPr lvl="0" indent="0" marL="0">
+              <a:buNone/>
+            </a:pPr>
+            <a:r>
+              <a:rPr/>
+              <a:t>Say plainly that the two diagnostics agreeing here is a property of this dataset’s four well-separated, comparably sized blobs - not a guarantee. Section 4 of the handout returns to a dataset where a diagnostic can be confidently wrong.</a:t>
             </a:r>
           </a:p>
           <a:p>
@@ -1797,21 +1797,21 @@
             </a:pPr>
             <a:r>
               <a:rPr/>
-              <a:t>Hand back exercise 7 briefly. A sentence on what went well, a sentence on the recurring gap — several reports read the random forest’s importance ranking as settled fact rather than as something section 7 of that lesson showed could be dominated by noise columns.</a:t>
-            </a:r>
-          </a:p>
-          <a:p>
-            <a:pPr lvl="0" indent="0" marL="0">
-              <a:buNone/>
-            </a:pPr>
-          </a:p>
-          <a:p>
-            <a:pPr lvl="0" indent="0" marL="0">
-              <a:buNone/>
-            </a:pPr>
-            <a:r>
-              <a:rPr/>
-              <a:t>Link forward: today has no labels at all, so there is no accuracy score to fall back on even provisionally. The obligation to check a result does not go away just because there is no y to check it against — it changes shape, and section 4 of today’s handout is entirely about that change.</a:t>
+              <a:t>Hand back exercise 7 briefly. A sentence on what went well, a sentence on the recurring gap - several reports read the random forest’s importance ranking as settled fact rather than as something section 7 of that lesson showed could be dominated by noise columns.</a:t>
+            </a:r>
+          </a:p>
+          <a:p>
+            <a:pPr lvl="0" indent="0" marL="0">
+              <a:buNone/>
+            </a:pPr>
+          </a:p>
+          <a:p>
+            <a:pPr lvl="0" indent="0" marL="0">
+              <a:buNone/>
+            </a:pPr>
+            <a:r>
+              <a:rPr/>
+              <a:t>Link forward: today has no labels at all, so there is no accuracy score to fall back on even provisionally. The obligation to check a result does not go away just because there is no y to check it against - it changes shape, and section 4 of today’s handout is entirely about that change.</a:t>
             </a:r>
           </a:p>
         </p:txBody>
@@ -1893,7 +1893,7 @@
             </a:pPr>
             <a:r>
               <a:rPr/>
-              <a:t>State both numbers before the punchline. The agreement is genuinely nice for teaching, but resist letting the class walk away thinking the two diagnostics always agree — that is exactly the kind of overclaim the handout’s “predictable mistake” boxes exist to head off, and this lesson’s own section 4 will show a case where a diagnostic looks fine and is not.</a:t>
+              <a:t>State both numbers before the punchline. The agreement is genuinely nice for teaching, but resist letting the class walk away thinking the two diagnostics always agree - that is exactly the kind of overclaim the handout’s “predictable mistake” boxes exist to head off, and this lesson’s own section 4 will show a case where a diagnostic looks fine and is not.</a:t>
             </a:r>
           </a:p>
           <a:p>
@@ -1999,7 +1999,7 @@
             </a:r>
             <a:r>
               <a:rPr/>
-              <a:t>, never shown to k-means. Right: k-means’ own k=4 clustering, fitted centres marked. Visually near-identical — say the number on the next slide rather than here, since this slide is the figure alone.</a:t>
+              <a:t>, never shown to k-means. Right: k-means’ own k=4 clustering, fitted centres marked. Visually near-identical - say the number on the next slide rather than here, since this slide is the figure alone.</a:t>
             </a:r>
           </a:p>
           <a:p>
@@ -2109,7 +2109,7 @@
             </a:pPr>
             <a:r>
               <a:rPr/>
-              <a:t>Give the definition before the number, since ARI will recur for the rest of the lesson as the standard way to score a clustering against a truth. 0.985 is about as good as this metric gets — worth contrasting later against the bot/human numbers in section 3, which come out negative.</a:t>
+              <a:t>Give the definition before the number, since ARI will recur for the rest of the lesson as the standard way to score a clustering against a truth. 0.985 is about as good as this metric gets - worth contrasting later against the bot/human numbers in section 3, which come out negative.</a:t>
             </a:r>
           </a:p>
           <a:p>
@@ -2233,7 +2233,7 @@
             </a:pPr>
             <a:r>
               <a:rPr/>
-              <a:t>Have them watch the from-scratch assign/update loop converge on the six-point worked example before scikit-learn’s version ever runs — the agreement is checked, not assumed.</a:t>
+              <a:t>Have them watch the from-scratch assign/update loop converge on the six-point worked example before scikit-learn’s version ever runs - the agreement is checked, not assumed.</a:t>
             </a:r>
           </a:p>
           <a:p>
@@ -2329,7 +2329,7 @@
             </a:pPr>
             <a:r>
               <a:rPr/>
-              <a:t>Set this up as a deliberate provocation, not a natural dataset. Section 2 just showed k-means recovering four clusters almost perfectly — this section is built specifically to break the assumption that made that possible.</a:t>
+              <a:t>Set this up as a deliberate provocation, not a natural dataset. Section 2 just showed k-means recovering four clusters almost perfectly - this section is built specifically to break the assumption that made that possible.</a:t>
             </a:r>
           </a:p>
           <a:p>
@@ -2439,7 +2439,7 @@
             </a:pPr>
             <a:r>
               <a:rPr/>
-              <a:t>A dense smudge sitting inside a much larger, looser cloud, both centred in roughly the same place. Let the room look for a gap a linear or round boundary could exploit — there isn’t one, and that is the point.</a:t>
+              <a:t>A dense smudge sitting inside a much larger, looser cloud, both centred in roughly the same place. Let the room look for a gap a linear or round boundary could exploit - there isn’t one, and that is the point.</a:t>
             </a:r>
           </a:p>
           <a:p>
@@ -2549,21 +2549,21 @@
             </a:pPr>
             <a:r>
               <a:rPr/>
-              <a:t>Stress “no starting point fixes it” — this is not the local-minimum problem from section 2.2, which k-means++ addresses. This is a mismatch between what k-means optimises (compactness) and what the data actually looks like (a core and a surrounding ring, same centre). Better initialisation cannot fix an objective that is the wrong shape for the data.</a:t>
-            </a:r>
-          </a:p>
-          <a:p>
-            <a:pPr lvl="0" indent="0" marL="0">
-              <a:buNone/>
-            </a:pPr>
-          </a:p>
-          <a:p>
-            <a:pPr lvl="0" indent="0" marL="0">
-              <a:buNone/>
-            </a:pPr>
-            <a:r>
-              <a:rPr/>
-              <a:t>Ask the room: what would a “cluster” need to mean for this shape to be findable at all? The answer — density, not compactness — is where the next two sections go.</a:t>
+              <a:t>Stress “no starting point fixes it” - this is not the local-minimum problem from section 2.2, which k-means++ addresses. This is a mismatch between what k-means optimises (compactness) and what the data actually looks like (a core and a surrounding ring, same centre). Better initialisation cannot fix an objective that is the wrong shape for the data.</a:t>
+            </a:r>
+          </a:p>
+          <a:p>
+            <a:pPr lvl="0" indent="0" marL="0">
+              <a:buNone/>
+            </a:pPr>
+          </a:p>
+          <a:p>
+            <a:pPr lvl="0" indent="0" marL="0">
+              <a:buNone/>
+            </a:pPr>
+            <a:r>
+              <a:rPr/>
+              <a:t>Ask the room: what would a “cluster” need to mean for this shape to be findable at all? The answer - density, not compactness - is where the next two sections go.</a:t>
             </a:r>
           </a:p>
           <a:p>
@@ -2659,7 +2659,7 @@
             </a:pPr>
             <a:r>
               <a:rPr/>
-              <a:t>Introduce the dendrogram as an object before any linkage rule — the tree itself is the useful idea, and any linkage rule can build one. Say explicitly that choosing k after the fact, by cutting the tree at a height, is a genuinely different workflow from k-means, where k has to be fixed before the algorithm starts.</a:t>
+              <a:t>Introduce the dendrogram as an object before any linkage rule - the tree itself is the useful idea, and any linkage rule can build one. Say explicitly that choosing k after the fact, by cutting the tree at a height, is a genuinely different workflow from k-means, where k has to be fixed before the algorithm starts.</a:t>
             </a:r>
           </a:p>
           <a:p>
@@ -2769,7 +2769,7 @@
             </a:pPr>
             <a:r>
               <a:rPr/>
-              <a:t>Four rules, four different biases — worth naming what each one is built to find, since the next slide is going to show all four failing on this particular dataset for two different reasons.</a:t>
+              <a:t>Four rules, four different biases - worth naming what each one is built to find, since the next slide is going to show all four failing on this particular dataset for two different reasons.</a:t>
             </a:r>
           </a:p>
           <a:p>
@@ -2879,7 +2879,7 @@
             </a:pPr>
             <a:r>
               <a:rPr/>
-              <a:t>A branch peeling off single points one at a time, rather than splitting into two comparably sized halves, is the visual signature of chaining — point it out directly on the figure, even at this small 60-session sample.</a:t>
+              <a:t>A branch peeling off single points one at a time, rather than splitting into two comparably sized halves, is the visual signature of chaining - point it out directly on the figure, even at this small 60-session sample.</a:t>
             </a:r>
           </a:p>
           <a:p>
@@ -2989,7 +2989,7 @@
             </a:pPr>
             <a:r>
               <a:rPr/>
-              <a:t>Make the shift concrete rather than abstract. Ask the room: if you were handed 2,000 customers’ spending records with no group name attached to any of them, what would “a good answer” even mean, before any algorithm runs? There is no accuracy to check against — only whether the grouping looks and behaves like something real.</a:t>
+              <a:t>Make the shift concrete rather than abstract. Ask the room: if you were handed 2,000 customers’ spending records with no group name attached to any of them, what would “a good answer” even mean, before any algorithm runs? There is no accuracy to check against - only whether the grouping looks and behaves like something real.</a:t>
             </a:r>
           </a:p>
           <a:p>
@@ -3099,7 +3099,7 @@
             </a:pPr>
             <a:r>
               <a:rPr/>
-              <a:t>Read the two failure modes separately, they are not the same failure. Ward and complete fail for the same reason k-means did — both still search for compact, comparably sized pieces, which this shape does not have. Single and average instead produce one cluster of 1,499 points and a cluster of size 1 — not a discovery, but chaining: the algorithm absorbed almost the entire dataset along its densest path before running out of points to merge.</a:t>
+              <a:t>Read the two failure modes separately, they are not the same failure. Ward and complete fail for the same reason k-means did - both still search for compact, comparably sized pieces, which this shape does not have. Single and average instead produce one cluster of 1,499 points and a cluster of size 1 - not a discovery, but chaining: the algorithm absorbed almost the entire dataset along its densest path before running out of points to merge.</a:t>
             </a:r>
           </a:p>
           <a:p>
@@ -3121,7 +3121,7 @@
             </a:r>
             <a:r>
               <a:rPr/>
-              <a:t>. Hierarchical clustering, by itself, is not a fix for the shape problem — it needs a rule that looks for density rather than compactness or chained proximity.</a:t>
+              <a:t>. Hierarchical clustering, by itself, is not a fix for the shape problem - it needs a rule that looks for density rather than compactness or chained proximity.</a:t>
             </a:r>
           </a:p>
           <a:p>
@@ -3217,7 +3217,7 @@
             </a:pPr>
             <a:r>
               <a:rPr/>
-              <a:t>Twelve minutes. What comes back after the break is the method that actually solves the bot/human problem — worth saying, so the room returns with the open question fresh: what would a cluster need to mean for that ring-around-a-core shape to be findable?</a:t>
+              <a:t>Twelve minutes. What comes back after the break is the method that actually solves the bot/human problem - worth saying, so the room returns with the open question fresh: what would a cluster need to mean for that ring-around-a-core shape to be findable?</a:t>
             </a:r>
           </a:p>
         </p:txBody>
@@ -3299,21 +3299,21 @@
             </a:pPr>
             <a:r>
               <a:rPr/>
-              <a:t>Say the name in full once, then use the acronym. Walk the three point types slowly — core, border, noise — since the next slide’s definition of a cluster depends on all three.</a:t>
-            </a:r>
-          </a:p>
-          <a:p>
-            <a:pPr lvl="0" indent="0" marL="0">
-              <a:buNone/>
-            </a:pPr>
-          </a:p>
-          <a:p>
-            <a:pPr lvl="0" indent="0" marL="0">
-              <a:buNone/>
-            </a:pPr>
-            <a:r>
-              <a:rPr/>
-              <a:t>Nothing here mentions a centre or a mean — flag that explicitly as the structural difference from everything in sections 2 and 3.2.</a:t>
+              <a:t>Say the name in full once, then use the acronym. Walk the three point types slowly - core, border, noise - since the next slide’s definition of a cluster depends on all three.</a:t>
+            </a:r>
+          </a:p>
+          <a:p>
+            <a:pPr lvl="0" indent="0" marL="0">
+              <a:buNone/>
+            </a:pPr>
+          </a:p>
+          <a:p>
+            <a:pPr lvl="0" indent="0" marL="0">
+              <a:buNone/>
+            </a:pPr>
+            <a:r>
+              <a:rPr/>
+              <a:t>Nothing here mentions a centre or a mean - flag that explicitly as the structural difference from everything in sections 2 and 3.2.</a:t>
             </a:r>
           </a:p>
           <a:p>
@@ -3423,7 +3423,7 @@
             </a:pPr>
             <a:r>
               <a:rPr/>
-              <a:t>The “noise is first-class” point matters on its own — every method in sections 2 and 3.2 must assign every point to exactly one cluster. DBSCAN does not, and section 3.3’s numbers later show exactly what that buys.</a:t>
+              <a:t>The “noise is first-class” point matters on its own - every method in sections 2 and 3.2 must assign every point to exactly one cluster. DBSCAN does not, and section 3.3’s numbers later show exactly what that buys.</a:t>
             </a:r>
           </a:p>
           <a:p>
@@ -3529,7 +3529,7 @@
             </a:r>
             <a:r>
               <a:rPr/>
-              <a:t> sits between them — motivate the k-distance plot as a principled way to find that middle point rather than guessing.</a:t>
+              <a:t> sits between them - motivate the k-distance plot as a principled way to find that middle point rather than guessing.</a:t>
             </a:r>
           </a:p>
           <a:p>
@@ -3659,7 +3659,7 @@
             </a:r>
             <a:r>
               <a:rPr/>
-              <a:t> sits just past the bend, in the flat region — point at exactly where on the curve that is. This is the value used on the next slide’s results.</a:t>
+              <a:t> sits just past the bend, in the flat region - point at exactly where on the curve that is. This is the value used on the next slide’s results.</a:t>
             </a:r>
           </a:p>
           <a:p>
@@ -3755,21 +3755,21 @@
             </a:pPr>
             <a:r>
               <a:rPr/>
-              <a:t>0.941 against k-means’ -0.046 and Ward’s -0.062 on the identical dataset — same data, a method built for the actual shape.</a:t>
-            </a:r>
-          </a:p>
-          <a:p>
-            <a:pPr lvl="0" indent="0" marL="0">
-              <a:buNone/>
-            </a:pPr>
-          </a:p>
-          <a:p>
-            <a:pPr lvl="0" indent="0" marL="0">
-              <a:buNone/>
-            </a:pPr>
-            <a:r>
-              <a:rPr/>
-              <a:t>Worth reading the noise points individually rather than as a rounding error: checking their true label shows all 13 are genuine human sessions, not misplaced bots — sessions whose one week of browsing happened, by chance, to look almost as mechanically regular as a script’s. DBSCAN’s answer for them — not confidently either group — is more honest than a forced binary label, and it is an answer no method in section 2 or 3.2 can even give.</a:t>
+              <a:t>0.941 against k-means’ -0.046 and Ward’s -0.062 on the identical dataset - same data, a method built for the actual shape.</a:t>
+            </a:r>
+          </a:p>
+          <a:p>
+            <a:pPr lvl="0" indent="0" marL="0">
+              <a:buNone/>
+            </a:pPr>
+          </a:p>
+          <a:p>
+            <a:pPr lvl="0" indent="0" marL="0">
+              <a:buNone/>
+            </a:pPr>
+            <a:r>
+              <a:rPr/>
+              <a:t>Worth reading the noise points individually rather than as a rounding error: checking their true label shows all 13 are genuine human sessions, not misplaced bots - sessions whose one week of browsing happened, by chance, to look almost as mechanically regular as a script’s. DBSCAN’s answer for them - not confidently either group - is more honest than a forced binary label, and it is an answer no method in section 2 or 3.2 can even give.</a:t>
             </a:r>
           </a:p>
           <a:p>
@@ -3865,21 +3865,21 @@
             </a:pPr>
             <a:r>
               <a:rPr/>
-              <a:t>True group, k-means, and DBSCAN on the same axes. DBSCAN’s cluster boundary follows the actual density gap; k-means’ straight cut does not exist in this data at all — point directly at the contrast rather than describing it.</a:t>
-            </a:r>
-          </a:p>
-          <a:p>
-            <a:pPr lvl="0" indent="0" marL="0">
-              <a:buNone/>
-            </a:pPr>
-          </a:p>
-          <a:p>
-            <a:pPr lvl="0" indent="0" marL="0">
-              <a:buNone/>
-            </a:pPr>
-            <a:r>
-              <a:rPr/>
-              <a:t>This is the single figure to leave up longest in this segment — it makes the whole section’s argument visible in one look.</a:t>
+              <a:t>True group, k-means, and DBSCAN on the same axes. DBSCAN’s cluster boundary follows the actual density gap; k-means’ straight cut does not exist in this data at all - point directly at the contrast rather than describing it.</a:t>
+            </a:r>
+          </a:p>
+          <a:p>
+            <a:pPr lvl="0" indent="0" marL="0">
+              <a:buNone/>
+            </a:pPr>
+          </a:p>
+          <a:p>
+            <a:pPr lvl="0" indent="0" marL="0">
+              <a:buNone/>
+            </a:pPr>
+            <a:r>
+              <a:rPr/>
+              <a:t>This is the single figure to leave up longest in this segment - it makes the whole section’s argument visible in one look.</a:t>
             </a:r>
           </a:p>
           <a:p>
@@ -3975,7 +3975,7 @@
             </a:pPr>
             <a:r>
               <a:rPr/>
-              <a:t>Seven weeks regenerated from the same generator — same site, same bot fraction, same shapes, different individual sessions. Read the two ARI columns against each other before saying anything.</a:t>
+              <a:t>Seven weeks regenerated from the same generator - same site, same bot fraction, same shapes, different individual sessions. Read the two ARI columns against each other before saying anything.</a:t>
             </a:r>
           </a:p>
           <a:p>
@@ -3993,7 +3993,7 @@
             </a:r>
             <a:r>
               <a:rPr/>
-              <a:t> On two of the seven, DBSCAN returns a single cluster and an ARI of zero. Not a worse answer — no answer at all. The reason is in the knee column: 0.30 is larger than any of these weeks’ own curves suggest, and on those two draws it is large enough to bridge the density gap and swallow the ring into the core.</a:t>
+              <a:t> On two of the seven, DBSCAN returns a single cluster and an ARI of zero. Not a worse answer - no answer at all. The reason is in the knee column: 0.30 is larger than any of these weeks’ own curves suggest, and on those two draws it is large enough to bridge the density gap and swallow the ring into the core.</a:t>
             </a:r>
           </a:p>
           <a:p>
@@ -4043,7 +4043,7 @@
             </a:r>
             <a:r>
               <a:rPr/>
-              <a:t> the recipe — 0.941 against 0.890. Say the consequence out loud: the tuned constant is better where it works and absent where it does not.</a:t>
+              <a:t> the recipe - 0.941 against 0.890. Say the consequence out loud: the tuned constant is better where it works and absent where it does not.</a:t>
             </a:r>
           </a:p>
           <a:p>
@@ -4153,21 +4153,21 @@
             </a:pPr>
             <a:r>
               <a:rPr/>
-              <a:t>This table is worth reading as a decision the data makes, not the analyst. The predictable mistake, from the handout: having watched k-means recover the customer segments almost perfectly in section 2, the reasonable conclusion is that clustering as a category works well. The instinct is not wrong about k-means specifically — it is wrong about clustering being one method with one assumption.</a:t>
-            </a:r>
-          </a:p>
-          <a:p>
-            <a:pPr lvl="0" indent="0" marL="0">
-              <a:buNone/>
-            </a:pPr>
-          </a:p>
-          <a:p>
-            <a:pPr lvl="0" indent="0" marL="0">
-              <a:buNone/>
-            </a:pPr>
-            <a:r>
-              <a:rPr/>
-              <a:t>k-means and Ward both optimise “compact and round”; DBSCAN optimises “densely connected” — a nested structure like today’s bot core is exactly where the two notions give opposite answers, and which definition is right is a property of the data, not the algorithm.</a:t>
+              <a:t>This table is worth reading as a decision the data makes, not the analyst. The predictable mistake, from the handout: having watched k-means recover the customer segments almost perfectly in section 2, the reasonable conclusion is that clustering as a category works well. The instinct is not wrong about k-means specifically - it is wrong about clustering being one method with one assumption.</a:t>
+            </a:r>
+          </a:p>
+          <a:p>
+            <a:pPr lvl="0" indent="0" marL="0">
+              <a:buNone/>
+            </a:pPr>
+          </a:p>
+          <a:p>
+            <a:pPr lvl="0" indent="0" marL="0">
+              <a:buNone/>
+            </a:pPr>
+            <a:r>
+              <a:rPr/>
+              <a:t>k-means and Ward both optimise “compact and round”; DBSCAN optimises “densely connected” - a nested structure like today’s bot core is exactly where the two notions give opposite answers, and which definition is right is a property of the data, not the algorithm.</a:t>
             </a:r>
           </a:p>
           <a:p>
@@ -4263,21 +4263,21 @@
             </a:pPr>
             <a:r>
               <a:rPr/>
-              <a:t>Walk the three problems as three genuinely different shapes of “no labels” — not three demonstrations of the same idea. Segmenting customers is close to what students probably picture when they hear “clustering.” Bots-versus-humans is deliberately built to break that picture: same mean, different spread. The fraud problem breaks it again: individually unremarkable values, anomalous only in combination.</a:t>
-            </a:r>
-          </a:p>
-          <a:p>
-            <a:pPr lvl="0" indent="0" marL="0">
-              <a:buNone/>
-            </a:pPr>
-          </a:p>
-          <a:p>
-            <a:pPr lvl="0" indent="0" marL="0">
-              <a:buNone/>
-            </a:pPr>
-            <a:r>
-              <a:rPr/>
-              <a:t>Say explicitly that one notebook is not “the more advanced version” of another — each is chosen because a different method is the right tool for it, and section 8 of the handout is the summary table of when to reach for which.</a:t>
+              <a:t>Walk the three problems as three genuinely different shapes of “no labels” - not three demonstrations of the same idea. Segmenting customers is close to what students probably picture when they hear “clustering.” Bots-versus-humans is deliberately built to break that picture: same mean, different spread. The fraud problem breaks it again: individually unremarkable values, anomalous only in combination.</a:t>
+            </a:r>
+          </a:p>
+          <a:p>
+            <a:pPr lvl="0" indent="0" marL="0">
+              <a:buNone/>
+            </a:pPr>
+          </a:p>
+          <a:p>
+            <a:pPr lvl="0" indent="0" marL="0">
+              <a:buNone/>
+            </a:pPr>
+            <a:r>
+              <a:rPr/>
+              <a:t>Say explicitly that one notebook is not “the more advanced version” of another - each is chosen because a different method is the right tool for it, and section 8 of the handout is the summary table of when to reach for which.</a:t>
             </a:r>
           </a:p>
           <a:p>
@@ -4397,7 +4397,7 @@
             </a:r>
             <a:r>
               <a:rPr/>
-              <a:t> sweep if time is short — watching ARI rise and then fall again as </a:t>
+              <a:t> sweep if time is short - watching ARI rise and then fall again as </a:t>
             </a:r>
             <a:r>
               <a:rPr>
@@ -4517,7 +4517,7 @@
             </a:pPr>
             <a:r>
               <a:rPr/>
-              <a:t>Set up the two-way split before naming either family — internal (only the clustering and the data) versus external (an outside answer key) — the next two slides take one each.</a:t>
+              <a:t>Set up the two-way split before naming either family - internal (only the clustering and the data) versus external (an outside answer key) - the next two slides take one each.</a:t>
             </a:r>
           </a:p>
           <a:p>
@@ -4613,7 +4613,7 @@
             </a:pPr>
             <a:r>
               <a:rPr/>
-              <a:t>Silhouette already appeared in section 2.3 as a way to choose k — here it is being recast as one member of a broader category, “internal metrics,” which is the useful generalisation.</a:t>
+              <a:t>Silhouette already appeared in section 2.3 as a way to choose k - here it is being recast as one member of a broader category, “internal metrics,” which is the useful generalisation.</a:t>
             </a:r>
           </a:p>
           <a:p>
@@ -4723,21 +4723,21 @@
             </a:pPr>
             <a:r>
               <a:rPr/>
-              <a:t>The examples of a real-world external signal matter more than the definition here — a downstream outcome (blocked and never returned) is the kind of proxy label that is available far more often than a clean, hand-verified truth, and it is worth spending a moment on that it counts even when partial or noisy.</a:t>
-            </a:r>
-          </a:p>
-          <a:p>
-            <a:pPr lvl="0" indent="0" marL="0">
-              <a:buNone/>
-            </a:pPr>
-          </a:p>
-          <a:p>
-            <a:pPr lvl="0" indent="0" marL="0">
-              <a:buNone/>
-            </a:pPr>
-            <a:r>
-              <a:rPr/>
-              <a:t>Set up the punchline explicitly: internal metrics can be confidently wrong, because they have no way to know the clustering’s underlying assumption is the wrong one for this data — only whether it is self-consistent. That is the next slide.</a:t>
+              <a:t>The examples of a real-world external signal matter more than the definition here - a downstream outcome (blocked and never returned) is the kind of proxy label that is available far more often than a clean, hand-verified truth, and it is worth spending a moment on that it counts even when partial or noisy.</a:t>
+            </a:r>
+          </a:p>
+          <a:p>
+            <a:pPr lvl="0" indent="0" marL="0">
+              <a:buNone/>
+            </a:pPr>
+          </a:p>
+          <a:p>
+            <a:pPr lvl="0" indent="0" marL="0">
+              <a:buNone/>
+            </a:pPr>
+            <a:r>
+              <a:rPr/>
+              <a:t>Set up the punchline explicitly: internal metrics can be confidently wrong, because they have no way to know the clustering’s underlying assumption is the wrong one for this data - only whether it is self-consistent. That is the next slide.</a:t>
             </a:r>
           </a:p>
           <a:p>
@@ -4833,7 +4833,7 @@
             </a:pPr>
             <a:r>
               <a:rPr/>
-              <a:t>This is the handout’s named predictable mistake, and it deserves to be said slowly. Ask the room directly: if you only had the silhouette score and not the ARI, would you have any hint that k-means’ clustering on the session data is worthless? The honest answer is no — the internal metric alone gives no warning.</a:t>
+              <a:t>This is the handout’s named predictable mistake, and it deserves to be said slowly. Ask the room directly: if you only had the silhouette score and not the ARI, would you have any hint that k-means’ clustering on the session data is worthless? The honest answer is no - the internal metric alone gives no warning.</a:t>
             </a:r>
           </a:p>
           <a:p>
@@ -4943,21 +4943,21 @@
             </a:pPr>
             <a:r>
               <a:rPr/>
-              <a:t>Aurora’s account table has 8 columns. The block of warm cells among spend-related columns, and the separate block among engagement-related columns, is the correlation structure PCA is about to compress — point at both blocks directly.</a:t>
-            </a:r>
-          </a:p>
-          <a:p>
-            <a:pPr lvl="0" indent="0" marL="0">
-              <a:buNone/>
-            </a:pPr>
-          </a:p>
-          <a:p>
-            <a:pPr lvl="0" indent="0" marL="0">
-              <a:buNone/>
-            </a:pPr>
-            <a:r>
-              <a:rPr/>
-              <a:t>Say plainly what this figure is doing here: it is the motivation for everything that follows, not a result. Spend, basket value and mobile session count all move together because they partly reflect the same underlying tendency to spend — PCA is about to find that underlying tendency directly.</a:t>
+              <a:t>Aurora’s account table has 8 columns. The block of warm cells among spend-related columns, and the separate block among engagement-related columns, is the correlation structure PCA is about to compress - point at both blocks directly.</a:t>
+            </a:r>
+          </a:p>
+          <a:p>
+            <a:pPr lvl="0" indent="0" marL="0">
+              <a:buNone/>
+            </a:pPr>
+          </a:p>
+          <a:p>
+            <a:pPr lvl="0" indent="0" marL="0">
+              <a:buNone/>
+            </a:pPr>
+            <a:r>
+              <a:rPr/>
+              <a:t>Say plainly what this figure is doing here: it is the motivation for everything that follows, not a result. Spend, basket value and mobile session count all move together because they partly reflect the same underlying tendency to spend - PCA is about to find that underlying tendency directly.</a:t>
             </a:r>
           </a:p>
           <a:p>
@@ -5053,21 +5053,21 @@
             </a:pPr>
             <a:r>
               <a:rPr/>
-              <a:t>Give the intuition before any algebra, exactly as the handout does: PCA is looking for the direction that best tells points apart, not a mysterious transform. “Safe to discard” is the key phrase — it is what makes dimensionality reduction a defensible operation rather than just throwing information away.</a:t>
-            </a:r>
-          </a:p>
-          <a:p>
-            <a:pPr lvl="0" indent="0" marL="0">
-              <a:buNone/>
-            </a:pPr>
-          </a:p>
-          <a:p>
-            <a:pPr lvl="0" indent="0" marL="0">
-              <a:buNone/>
-            </a:pPr>
-            <a:r>
-              <a:rPr/>
-              <a:t>The next few slides give the two derivations the handout works through in full — state results here, point to the handout for the steps.</a:t>
+              <a:t>Give the intuition before any algebra, exactly as the handout does: PCA is looking for the direction that best tells points apart, not a mysterious transform. “Safe to discard” is the key phrase - it is what makes dimensionality reduction a defensible operation rather than just throwing information away.</a:t>
+            </a:r>
+          </a:p>
+          <a:p>
+            <a:pPr lvl="0" indent="0" marL="0">
+              <a:buNone/>
+            </a:pPr>
+          </a:p>
+          <a:p>
+            <a:pPr lvl="0" indent="0" marL="0">
+              <a:buNone/>
+            </a:pPr>
+            <a:r>
+              <a:rPr/>
+              <a:t>The next few slides give the two derivations the handout works through in full - state results here, point to the handout for the steps.</a:t>
             </a:r>
           </a:p>
           <a:p>
@@ -5163,7 +5163,7 @@
             </a:pPr>
             <a:r>
               <a:rPr/>
-              <a:t>“Maximise variance” is meaningless until direction is separated from length — that is what the unit-length constraint buys. The handout works the constrained optimisation through a Lagrange multiplier in full — worth saying that word exists, not deriving it here.</a:t>
+              <a:t>“Maximise variance” is meaningless until direction is separated from length - that is what the unit-length constraint buys. The handout works the constrained optimisation through a Lagrange multiplier in full - worth saying that word exists, not deriving it here.</a:t>
             </a:r>
           </a:p>
           <a:p>
@@ -5259,7 +5259,7 @@
             </a:pPr>
             <a:r>
               <a:rPr/>
-              <a:t>Σ is the sample covariance matrix — for standardised columns, its diagonal is 1 and its off-diagonal entries are correlations, the same numbers the previous figure showed as colours.</a:t>
+              <a:t>Σ is the sample covariance matrix - for standardised columns, its diagonal is 1 and its off-diagonal entries are correlations, the same numbers the previous figure showed as colours.</a:t>
             </a:r>
           </a:p>
           <a:p>
@@ -5355,21 +5355,21 @@
             </a:pPr>
             <a:r>
               <a:rPr/>
-              <a:t>State the result, not the Lagrangian steps that get there — those are handout section 5.2, in full. Say what this equation means in words: directions that solve the constrained maximisation are exactly the eigenvectors of the covariance matrix, with λ the corresponding eigenvalue.</a:t>
-            </a:r>
-          </a:p>
-          <a:p>
-            <a:pPr lvl="0" indent="0" marL="0">
-              <a:buNone/>
-            </a:pPr>
-          </a:p>
-          <a:p>
-            <a:pPr lvl="0" indent="0" marL="0">
-              <a:buNone/>
-            </a:pPr>
-            <a:r>
-              <a:rPr/>
-              <a:t>Substituting back gives vᵀ Σ v = λ — the variance a direction captures </a:t>
+              <a:t>State the result, not the Lagrangian steps that get there - those are handout section 5.2, in full. Say what this equation means in words: directions that solve the constrained maximisation are exactly the eigenvectors of the covariance matrix, with λ the corresponding eigenvalue.</a:t>
+            </a:r>
+          </a:p>
+          <a:p>
+            <a:pPr lvl="0" indent="0" marL="0">
+              <a:buNone/>
+            </a:pPr>
+          </a:p>
+          <a:p>
+            <a:pPr lvl="0" indent="0" marL="0">
+              <a:buNone/>
+            </a:pPr>
+            <a:r>
+              <a:rPr/>
+              <a:t>Substituting back gives vᵀ Σ v = λ - the variance a direction captures </a:t>
             </a:r>
             <a:r>
               <a:rPr b="1"/>
@@ -5473,7 +5473,7 @@
             </a:pPr>
             <a:r>
               <a:rPr/>
-              <a:t>This is a methodological point, not a throwaway remark — flag it so it does not get lost under the numbers that follow. Every “matches the truth” claim this lesson makes (ARI scores, the scree plot recovering exactly 3 latent factors) is only checkable because the data was built for teaching. On a real, unlabelled dataset, none of those checks are available in the same form, which is precisely why section 4 exists: what is left to check when there genuinely is no answer key.</a:t>
+              <a:t>This is a methodological point, not a throwaway remark - flag it so it does not get lost under the numbers that follow. Every “matches the truth” claim this lesson makes (ARI scores, the scree plot recovering exactly 3 latent factors) is only checkable because the data was built for teaching. On a real, unlabelled dataset, none of those checks are available in the same form, which is precisely why section 4 exists: what is left to check when there genuinely is no answer key.</a:t>
             </a:r>
           </a:p>
           <a:p>
@@ -5577,7 +5577,7 @@
             </a:r>
             <a:r>
               <a:rPr/>
-              <a:t> PCA. Worth saying explicitly that this is the entire algorithm once the eigendecomposition is in hand — everything before this was justifying why eigenvectors are the right thing to compute at all.</a:t>
+              <a:t> PCA. Worth saying explicitly that this is the entire algorithm once the eigendecomposition is in hand - everything before this was justifying why eigenvectors are the right thing to compute at all.</a:t>
             </a:r>
           </a:p>
           <a:p>
@@ -5687,7 +5687,7 @@
             </a:pPr>
             <a:r>
               <a:rPr/>
-              <a:t>Two standardised features from section 2 — spend and visit frequency. For this symmetric 2×2 form, the eigenvalues are exactly 1+r and 1-r for correlation r, checkable directly from Σ v = λ v with no numerical solver — with r = 0.171: 1.171 and 0.829, matching </a:t>
+              <a:t>Two standardised features from section 2 - spend and visit frequency. For this symmetric 2×2 form, the eigenvalues are exactly 1+r and 1-r for correlation r, checkable directly from Σ v = λ v with no numerical solver - with r = 0.171: 1.171 and 0.829, matching </a:t>
             </a:r>
             <a:r>
               <a:rPr>
@@ -5711,7 +5711,7 @@
             </a:pPr>
             <a:r>
               <a:rPr/>
-              <a:t>The direction (1,1)/√2 is the “spend and visit often together” diagonal, not either axis alone — say why that makes sense: customers who spend more also tend to visit more, so the greatest joint variation runs along the diagonal between the two original features.</a:t>
+              <a:t>The direction (1,1)/√2 is the “spend and visit often together” diagonal, not either axis alone - say why that makes sense: customers who spend more also tend to visit more, so the greatest joint variation runs along the diagonal between the two original features.</a:t>
             </a:r>
           </a:p>
           <a:p>
@@ -5807,7 +5807,7 @@
             </a:pPr>
             <a:r>
               <a:rPr/>
-              <a:t>Callback to lesson 3 deliberately — condition number squaring is the same argument that motivated preferring gradient-based or QR-based solvers over the raw normal equation there, and it is worth naming that connection out loud so the pattern generalises for students.</a:t>
+              <a:t>Callback to lesson 3 deliberately - condition number squaring is the same argument that motivated preferring gradient-based or QR-based solvers over the raw normal equation there, and it is worth naming that connection out loud so the pattern generalises for students.</a:t>
             </a:r>
           </a:p>
           <a:p>
@@ -6013,7 +6013,7 @@
             </a:pPr>
             <a:r>
               <a:rPr/>
-              <a:t>This is a genuine cross-check, in the same spirit as the k-means++ notebook agreeing with scikit-learn to 10⁻⁴ earlier — three independent computational routes to the same mathematical object, converging to sixteen significant figures.</a:t>
+              <a:t>This is a genuine cross-check, in the same spirit as the k-means++ notebook agreeing with scikit-learn to 10⁻⁴ earlier - three independent computational routes to the same mathematical object, converging to sixteen significant figures.</a:t>
             </a:r>
           </a:p>
           <a:p>
@@ -6123,21 +6123,21 @@
             </a:pPr>
             <a:r>
               <a:rPr/>
-              <a:t>Per-component and cumulative explained variance for the 8 account features. The first 3 components explain 93.5% of total variance; the 4th adds only 2.4% more — point at exactly where the sharp elbow sits.</a:t>
-            </a:r>
-          </a:p>
-          <a:p>
-            <a:pPr lvl="0" indent="0" marL="0">
-              <a:buNone/>
-            </a:pPr>
-          </a:p>
-          <a:p>
-            <a:pPr lvl="0" indent="0" marL="0">
-              <a:buNone/>
-            </a:pPr>
-            <a:r>
-              <a:rPr/>
-              <a:t>Ask the room to predict the number before you say it — most will read the bend correctly from the shape alone, which is the whole point of a scree plot as a diagnostic.</a:t>
+              <a:t>Per-component and cumulative explained variance for the 8 account features. The first 3 components explain 93.5% of total variance; the 4th adds only 2.4% more - point at exactly where the sharp elbow sits.</a:t>
+            </a:r>
+          </a:p>
+          <a:p>
+            <a:pPr lvl="0" indent="0" marL="0">
+              <a:buNone/>
+            </a:pPr>
+          </a:p>
+          <a:p>
+            <a:pPr lvl="0" indent="0" marL="0">
+              <a:buNone/>
+            </a:pPr>
+            <a:r>
+              <a:rPr/>
+              <a:t>Ask the room to predict the number before you say it - most will read the bend correctly from the shape alone, which is the whole point of a scree plot as a diagnostic.</a:t>
             </a:r>
           </a:p>
           <a:p>
@@ -6233,7 +6233,7 @@
             </a:pPr>
             <a:r>
               <a:rPr/>
-              <a:t>3 is not an arbitrary read of the elbow — it is the exact number of latent factors (</a:t>
+              <a:t>3 is not an arbitrary read of the elbow - it is the exact number of latent factors (</a:t>
             </a:r>
             <a:r>
               <a:rPr>
@@ -6257,7 +6257,7 @@
             </a:pPr>
             <a:r>
               <a:rPr/>
-              <a:t>Say clearly that this clean an elbow will not appear on every dataset students meet later — it exists here because the generator built 8 columns as noisy linear combinations of exactly 3 signals. The next slide is what to do when it is not this clean.</a:t>
+              <a:t>Say clearly that this clean an elbow will not appear on every dataset students meet later - it exists here because the generator built 8 columns as noisy linear combinations of exactly 3 signals. The next slide is what to do when it is not this clean.</a:t>
             </a:r>
           </a:p>
           <a:p>
@@ -6353,7 +6353,7 @@
             </a:pPr>
             <a:r>
               <a:rPr/>
-              <a:t>Close the PCA segment by generalising beyond this lesson’s convenient dataset — students will not always get a number this clean, and this slide is explicitly about what changes when they don’t.</a:t>
+              <a:t>Close the PCA segment by generalising beyond this lesson’s convenient dataset - students will not always get a number this clean, and this slide is explicitly about what changes when they don’t.</a:t>
             </a:r>
           </a:p>
           <a:p>
@@ -6477,7 +6477,7 @@
             </a:pPr>
             <a:r>
               <a:rPr/>
-              <a:t>This is the lesson’s headline number and it is delivered live in the notebook rather than pre-built on a slide — reconstructing accounts from the top 3 components and watching genuine accounts snap back almost exactly, while planted anomalies do not, is more convincing run than described.</a:t>
+              <a:t>This is the lesson’s headline number and it is delivered live in the notebook rather than pre-built on a slide - reconstructing accounts from the top 3 components and watching genuine accounts snap back almost exactly, while planted anomalies do not, is more convincing run than described.</a:t>
             </a:r>
           </a:p>
           <a:p>
@@ -6595,21 +6595,21 @@
             </a:pPr>
             <a:r>
               <a:rPr/>
-              <a:t>Position t-SNE precisely: a visualisation tool, not a measurement tool, and the two limitations on this slide are the reason. Two clusters drawn far apart in a t-SNE plot are not necessarily more different than two drawn close together — resist any temptation to read distance off the picture the way a PCA plot’s axes can be read.</a:t>
-            </a:r>
-          </a:p>
-          <a:p>
-            <a:pPr lvl="0" indent="0" marL="0">
-              <a:buNone/>
-            </a:pPr>
-          </a:p>
-          <a:p>
-            <a:pPr lvl="0" indent="0" marL="0">
-              <a:buNone/>
-            </a:pPr>
-            <a:r>
-              <a:rPr/>
-              <a:t>Tie back directly to notebook 03: t-SNE inherited the exact same blind spot PCA’s 2-D projection had for the fraud anomalies — good for looking, not a substitute for reconstruction error. The full KL-divergence derivation is deliberately out of scope; point to the further reading.</a:t>
+              <a:t>Position t-SNE precisely: a visualisation tool, not a measurement tool, and the two limitations on this slide are the reason. Two clusters drawn far apart in a t-SNE plot are not necessarily more different than two drawn close together - resist any temptation to read distance off the picture the way a PCA plot’s axes can be read.</a:t>
+            </a:r>
+          </a:p>
+          <a:p>
+            <a:pPr lvl="0" indent="0" marL="0">
+              <a:buNone/>
+            </a:pPr>
+          </a:p>
+          <a:p>
+            <a:pPr lvl="0" indent="0" marL="0">
+              <a:buNone/>
+            </a:pPr>
+            <a:r>
+              <a:rPr/>
+              <a:t>Tie back directly to notebook 03: t-SNE inherited the exact same blind spot PCA’s 2-D projection had for the fraud anomalies - good for looking, not a substitute for reconstruction error. The full KL-divergence derivation is deliberately out of scope; point to the further reading.</a:t>
             </a:r>
           </a:p>
           <a:p>
@@ -6705,21 +6705,21 @@
             </a:pPr>
             <a:r>
               <a:rPr/>
-              <a:t>Let the picture sit for a moment before saying anything. Four clouds are visible to the eye before any algorithm runs — ask the room to count them before you say the number.</a:t>
-            </a:r>
-          </a:p>
-          <a:p>
-            <a:pPr lvl="0" indent="0" marL="0">
-              <a:buNone/>
-            </a:pPr>
-          </a:p>
-          <a:p>
-            <a:pPr lvl="0" indent="0" marL="0">
-              <a:buNone/>
-            </a:pPr>
-            <a:r>
-              <a:rPr/>
-              <a:t>That is not an accident of this dataset: it is exactly the structure k-means is built to exploit, and it is why this figure opens the section rather than any equation. The “try this” in the handout asks students to predict, from the four segment means alone, where each cloud should sit — worth mentioning as a pre-read they can still do retroactively.</a:t>
+              <a:t>Let the picture sit for a moment before saying anything. Four clouds are visible to the eye before any algorithm runs - ask the room to count them before you say the number.</a:t>
+            </a:r>
+          </a:p>
+          <a:p>
+            <a:pPr lvl="0" indent="0" marL="0">
+              <a:buNone/>
+            </a:pPr>
+          </a:p>
+          <a:p>
+            <a:pPr lvl="0" indent="0" marL="0">
+              <a:buNone/>
+            </a:pPr>
+            <a:r>
+              <a:rPr/>
+              <a:t>That is not an accident of this dataset: it is exactly the structure k-means is built to exploit, and it is why this figure opens the section rather than any equation. The “try this” in the handout asks students to predict, from the four segment means alone, where each cloud should sit - worth mentioning as a pre-read they can still do retroactively.</a:t>
             </a:r>
           </a:p>
           <a:p>
@@ -6829,21 +6829,21 @@
             </a:pPr>
             <a:r>
               <a:rPr/>
-              <a:t>Ask them to write it down — the fourth lesson this course has produced one of these carry-home numbers: 77% accuracy on coin-flip labels, 98 of 128 imputed rows that borrowed from the test set, an overfit coefficient of 247,514, and now this.</a:t>
-            </a:r>
-          </a:p>
-          <a:p>
-            <a:pPr lvl="0" indent="0" marL="0">
-              <a:buNone/>
-            </a:pPr>
-          </a:p>
-          <a:p>
-            <a:pPr lvl="0" indent="0" marL="0">
-              <a:buNone/>
-            </a:pPr>
-            <a:r>
-              <a:rPr/>
-              <a:t>If one habit should survive from today: before trusting an unlabelled result, ask what the metric or the picture in front of you is actually capable of seeing — a silhouette score cannot see a wrong shape assumption, and a 2-D scatter cannot see what the discarded dimensions would have shown.</a:t>
+              <a:t>Ask them to write it down - the fourth lesson this course has produced one of these carry-home numbers: 77% accuracy on coin-flip labels, 98 of 128 imputed rows that borrowed from the test set, an overfit coefficient of 247,514, and now this.</a:t>
+            </a:r>
+          </a:p>
+          <a:p>
+            <a:pPr lvl="0" indent="0" marL="0">
+              <a:buNone/>
+            </a:pPr>
+          </a:p>
+          <a:p>
+            <a:pPr lvl="0" indent="0" marL="0">
+              <a:buNone/>
+            </a:pPr>
+            <a:r>
+              <a:rPr/>
+              <a:t>If one habit should survive from today: before trusting an unlabelled result, ask what the metric or the picture in front of you is actually capable of seeing - a silhouette score cannot see a wrong shape assumption, and a 2-D scatter cannot see what the discarded dimensions would have shown.</a:t>
             </a:r>
           </a:p>
           <a:p>
@@ -6953,21 +6953,21 @@
             </a:pPr>
             <a:r>
               <a:rPr/>
-              <a:t>Remind them of the standing rule from lesson 5, still in force with no labels at all: every reported number needs a check against what the method could and could not see — an ARI needs a ground truth to be meaningful, a silhouette score needs to be read as roundness rather than correctness, and a reconstruction-error threshold needs its false-positive rate reported alongside its catch rate, not instead of it.</a:t>
-            </a:r>
-          </a:p>
-          <a:p>
-            <a:pPr lvl="0" indent="0" marL="0">
-              <a:buNone/>
-            </a:pPr>
-          </a:p>
-          <a:p>
-            <a:pPr lvl="0" indent="0" marL="0">
-              <a:buNone/>
-            </a:pPr>
-            <a:r>
-              <a:rPr/>
-              <a:t>Next lesson moves to a different question this course has not yet asked. Close the loop on today: four lessons in a row have each produced one number worth remembering — encourage them to notice that pattern themselves before it is pointed out again.</a:t>
+              <a:t>Remind them of the standing rule from lesson 5, still in force with no labels at all: every reported number needs a check against what the method could and could not see - an ARI needs a ground truth to be meaningful, a silhouette score needs to be read as roundness rather than correctness, and a reconstruction-error threshold needs its false-positive rate reported alongside its catch rate, not instead of it.</a:t>
+            </a:r>
+          </a:p>
+          <a:p>
+            <a:pPr lvl="0" indent="0" marL="0">
+              <a:buNone/>
+            </a:pPr>
+          </a:p>
+          <a:p>
+            <a:pPr lvl="0" indent="0" marL="0">
+              <a:buNone/>
+            </a:pPr>
+            <a:r>
+              <a:rPr/>
+              <a:t>Next lesson moves to a different question this course has not yet asked. Close the loop on today: four lessons in a row have each produced one number worth remembering - encourage them to notice that pattern themselves before it is pointed out again.</a:t>
             </a:r>
           </a:p>
         </p:txBody>
@@ -7063,7 +7063,7 @@
             </a:pPr>
             <a:r>
               <a:rPr/>
-              <a:t>Flag the two-kinds-of-variable structure before the objective appears — it is the reason the algorithm on the next few slides is two alternating, each individually easy, steps rather than one hard search.</a:t>
+              <a:t>Flag the two-kinds-of-variable structure before the objective appears - it is the reason the algorithm on the next few slides is two alternating, each individually easy, steps rather than one hard search.</a:t>
             </a:r>
           </a:p>
           <a:p>
@@ -7167,7 +7167,7 @@
             </a:r>
             <a:r>
               <a:rPr/>
-              <a:t> the assignment of every point at once, and rᵢj is just bookkeeping for which point goes where — 1 if point i is in cluster j, 0 otherwise, exactly one 1 per row.</a:t>
+              <a:t> the assignment of every point at once, and rᵢj is just bookkeeping for which point goes where - 1 if point i is in cluster j, 0 otherwise, exactly one 1 per row.</a:t>
             </a:r>
           </a:p>
           <a:p>
@@ -7277,7 +7277,7 @@
             </a:pPr>
             <a:r>
               <a:rPr/>
-              <a:t>This cannot be minimised in one shot: choosing the best assignment needs the centres, and choosing the best centres needs the assignment. Do not derive the two closed-form minimisations here — state that they exist and move to what they say on the next slide. The full derivation, including the gradient that gives the mean as the exact minimiser, is handout section 2.1, for after the lecture.</a:t>
+              <a:t>This cannot be minimised in one shot: choosing the best assignment needs the centres, and choosing the best centres needs the assignment. Do not derive the two closed-form minimisations here - state that they exist and move to what they say on the next slide. The full derivation, including the gradient that gives the mean as the exact minimiser, is handout section 2.1, for after the lecture.</a:t>
             </a:r>
           </a:p>
           <a:p>
@@ -10364,7 +10364,7 @@
             </a:pPr>
             <a:r>
               <a:rPr/>
-              <a:t>Lesson 8 — Unsupervised Learning</a:t>
+              <a:t>Lesson 8: Unsupervised Learning</a:t>
             </a:r>
           </a:p>
         </p:txBody>
@@ -10400,7 +10400,7 @@
             <a:br/>
             <a:r>
               <a:rPr/>
-              <a:t>Fabio Antonini — Università degli Studi dell’Aquila</a:t>
+              <a:t>Fabio Antonini, Università degli Studi dell’Aquila</a:t>
             </a:r>
           </a:p>
         </p:txBody>
@@ -10604,7 +10604,7 @@
             </a:r>
             <a:r>
               <a:rPr/>
-              <a:t> centre — exact minimiser over assignments</a:t>
+              <a:t> centre: exact minimiser over assignments</a:t>
             </a:r>
           </a:p>
           <a:p>
@@ -10623,7 +10623,7 @@
             </a:r>
             <a:r>
               <a:rPr/>
-              <a:t> of its points — where the algorithm’s name comes from</a:t>
+              <a:t> of its points, where the algorithm’s name comes from</a:t>
             </a:r>
           </a:p>
           <a:p>
@@ -10637,7 +10637,7 @@
             <a:pPr lvl="0"/>
             <a:r>
               <a:rPr/>
-              <a:t>Each step is an exact minimisation — no approximation, no step size</a:t>
+              <a:t>Each step is an exact minimisation, no approximation, no step size</a:t>
             </a:r>
           </a:p>
         </p:txBody>
@@ -10739,7 +10739,7 @@
             <a:pPr lvl="0"/>
             <a:r>
               <a:rPr/>
-              <a:t>Never increasing, cannot fall forever: the sequence must repeat — that is convergence</a:t>
+              <a:t>Never increasing, cannot fall forever: the sequence must repeat, and that is convergence</a:t>
             </a:r>
           </a:p>
           <a:p>
@@ -10754,7 +10754,7 @@
             </a:r>
             <a:r>
               <a:rPr/>
-              <a:t> minimum — not necessarily the </a:t>
+              <a:t> minimum, not necessarily the </a:t>
             </a:r>
             <a:r>
               <a:rPr b="1"/>
@@ -11205,7 +11205,7 @@
             </a:r>
             <a:r>
               <a:rPr/>
-              <a:t> — </a:t>
+              <a:t>, </a:t>
             </a:r>
             <a:r>
               <a:rPr b="1"/>
@@ -11235,7 +11235,7 @@
             <a:pPr lvl="0"/>
             <a:r>
               <a:rPr/>
-              <a:t>The naive fix — k points picked uniformly at random — gives no way to tell in advance which kind of run you got</a:t>
+              <a:t>The naive fix (k points picked uniformly at random) gives no way to tell in advance which kind of run you got</a:t>
             </a:r>
           </a:p>
         </p:txBody>
@@ -11412,7 +11412,7 @@
             </a:r>
             <a:r>
               <a:rPr/>
-              <a:t> — worst case improves ~300 units</a:t>
+              <a:t>: worst case improves ~300 units</a:t>
             </a:r>
           </a:p>
           <a:p>
@@ -11542,7 +11542,7 @@
             <a:pPr lvl="0"/>
             <a:r>
               <a:rPr/>
-              <a:t>WCSS is monotonically non-increasing in k — at k=m, J=0 exactly</a:t>
+              <a:t>WCSS is monotonically non-increasing in k: at k=m, J=0 exactly</a:t>
             </a:r>
           </a:p>
           <a:p>
@@ -11560,7 +11560,7 @@
             </a:r>
             <a:r>
               <a:rPr/>
-              <a:t>: where the WCSS curve stops falling steeply — past the true count, an extra centre only subdivides an already-coherent group</a:t>
+              <a:t>: where the WCSS curve stops falling steeply, past the true count, an extra centre only subdivides an already-coherent group</a:t>
             </a:r>
           </a:p>
         </p:txBody>
@@ -12030,7 +12030,7 @@
             </a:r>
             <a:r>
               <a:rPr/>
-              <a:t> — the sharpest bend in the elbow curve</a:t>
+              <a:t>, the sharpest bend in the elbow curve</a:t>
             </a:r>
           </a:p>
           <a:p>
@@ -12045,7 +12045,7 @@
             </a:r>
             <a:r>
               <a:rPr/>
-              <a:t> — the peak across k=1 to 8</a:t>
+              <a:t>, the peak across k=1 to 8</a:t>
             </a:r>
           </a:p>
           <a:p>
@@ -12252,7 +12252,7 @@
             <a:pPr lvl="0"/>
             <a:r>
               <a:rPr/>
-              <a:t>Cluster “0” need not mean the same thing on both sides — relabelling is handled</a:t>
+              <a:t>Cluster “0” need not mean the same thing on both sides: relabelling is handled</a:t>
             </a:r>
           </a:p>
           <a:p>
@@ -12267,7 +12267,7 @@
             </a:r>
             <a:r>
               <a:rPr/>
-              <a:t> — near-perfect</a:t>
+              <a:t>, near-perfect</a:t>
             </a:r>
           </a:p>
           <a:p>
@@ -12482,7 +12482,7 @@
             </a:r>
             <a:r>
               <a:rPr/>
-              <a:t> — scripted, behaviourally consistent</a:t>
+              <a:t>: scripted, behaviourally consistent</a:t>
             </a:r>
           </a:p>
           <a:p>
@@ -12497,7 +12497,7 @@
             </a:r>
             <a:r>
               <a:rPr/>
-              <a:t> — bots a tight cloud, humans a diffuse ring around that same centre</a:t>
+              <a:t>: bots a tight cloud, humans a diffuse ring around that same centre</a:t>
             </a:r>
           </a:p>
           <a:p>
@@ -12681,14 +12681,14 @@
             </a:r>
             <a:r>
               <a:rPr/>
-              <a:t> — indistinguishable from a random split</a:t>
+              <a:t>, indistinguishable from a random split</a:t>
             </a:r>
           </a:p>
           <a:p>
             <a:pPr lvl="0"/>
             <a:r>
               <a:rPr/>
-              <a:t>Not a tuning or initialisation failure — no starting point fixes it</a:t>
+              <a:t>Not a tuning or initialisation failure, no starting point fixes it</a:t>
             </a:r>
           </a:p>
           <a:p>
@@ -12806,7 +12806,7 @@
             </a:r>
             <a:r>
               <a:rPr/>
-              <a:t> clusters, recording every merge as a branch in a tree — a </a:t>
+              <a:t> clusters, recording every merge as a branch in a tree: a </a:t>
             </a:r>
             <a:r>
               <a:rPr b="1"/>
@@ -12832,7 +12832,7 @@
             </a:r>
             <a:r>
               <a:rPr/>
-              <a:t> — the </a:t>
+              <a:t>: the </a:t>
             </a:r>
             <a:r>
               <a:rPr b="1"/>
@@ -12920,7 +12920,7 @@
             </a:r>
             <a:r>
               <a:rPr/>
-              <a:t>: closest pair — can chain a winding path, or bridge two groups at one touching point</a:t>
+              <a:t>: closest pair, which can chain a winding path, or bridge two groups at one touching point</a:t>
             </a:r>
           </a:p>
           <a:p>
@@ -12931,7 +12931,7 @@
             </a:r>
             <a:r>
               <a:rPr/>
-              <a:t>: farthest pair — favours compact groups</a:t>
+              <a:t>: farthest pair, which favours compact groups</a:t>
             </a:r>
           </a:p>
           <a:p>
@@ -12942,7 +12942,7 @@
             </a:r>
             <a:r>
               <a:rPr/>
-              <a:t>: mean distance over every cross-pair — a compromise</a:t>
+              <a:t>: mean distance over every cross-pair, a compromise</a:t>
             </a:r>
           </a:p>
           <a:p>
@@ -12953,7 +12953,7 @@
             </a:r>
             <a:r>
               <a:rPr/>
-              <a:t>: least added variance — the </a:t>
+              <a:t>: least added variance, the </a:t>
             </a:r>
             <a:r>
               <a:rPr i="1"/>
@@ -13628,7 +13628,7 @@
             </a:r>
             <a:r>
               <a:rPr/>
-              <a:t> — density-based spatial clustering of applications with noise</a:t>
+              <a:t>: density-based spatial clustering of applications with noise</a:t>
             </a:r>
           </a:p>
           <a:p>
@@ -13830,7 +13830,7 @@
             </a:r>
             <a:r>
               <a:rPr/>
-              <a:t>, separately, a diffuse ring both count — if dense enough at the scale </a:t>
+              <a:t>, separately, a diffuse ring both count: if dense enough at the scale </a:t>
             </a:r>
             <a:r>
               <a:rPr>
@@ -13855,7 +13855,7 @@
             </a:r>
             <a:r>
               <a:rPr/>
-              <a:t> — noise is first-class, not an error</a:t>
+              <a:t>: noise is first-class, not an error</a:t>
             </a:r>
           </a:p>
         </p:txBody>
@@ -13942,7 +13942,7 @@
             <a:pPr lvl="0"/>
             <a:r>
               <a:rPr/>
-              <a:t>Too large: the ring bridges back into the core — everything merges, as Ward linkage did</a:t>
+              <a:t>Too large: the ring bridges back into the core, everything merges, as Ward linkage did</a:t>
             </a:r>
           </a:p>
           <a:p>
@@ -13974,7 +13974,7 @@
             <a:pPr lvl="0"/>
             <a:r>
               <a:rPr/>
-              <a:t>Dense regions give a small distance, sparse ones a large one — the plot typically bends sharply between the two</a:t>
+              <a:t>Dense regions give a small distance, sparse ones a large one: the plot typically bends sharply between the two</a:t>
             </a:r>
           </a:p>
         </p:txBody>
@@ -14605,7 +14605,7 @@
                       </a:r>
                       <a:r>
                         <a:rPr/>
-                        <a:t> — </a:t>
+                        <a:t>, </a:t>
                       </a:r>
                       <a:r>
                         <a:rPr i="1"/>
@@ -14675,7 +14675,7 @@
                       </a:r>
                       <a:r>
                         <a:rPr/>
-                        <a:t> — </a:t>
+                        <a:t>, </a:t>
                       </a:r>
                       <a:r>
                         <a:rPr i="1"/>
@@ -14867,7 +14867,7 @@
             </a:r>
             <a:r>
               <a:rPr/>
-              <a:t> removes y — measurements, no answer key</a:t>
+              <a:t> removes y: measurements, no answer key</a:t>
             </a:r>
           </a:p>
           <a:p>
@@ -14881,7 +14881,7 @@
             <a:pPr lvl="0"/>
             <a:r>
               <a:rPr/>
-              <a:t>Most organisational data was never labelled — expensive, slow, often not well-defined</a:t>
+              <a:t>Most organisational data was never labelled: expensive, slow, often not well-defined</a:t>
             </a:r>
           </a:p>
           <a:p>
@@ -15054,7 +15054,7 @@
                       </a:pPr>
                       <a:r>
                         <a:rPr/>
-                        <a:t>Want the hierarchy itself — nested groupings at every scale</a:t>
+                        <a:t>Want the hierarchy itself: nested groupings at every scale</a:t>
                       </a:r>
                     </a:p>
                   </a:txBody>
@@ -15322,7 +15322,7 @@
             <a:pPr lvl="0"/>
             <a:r>
               <a:rPr/>
-              <a:t>Every check so far — ARI in sections 2 and 3 — used a ground truth this lesson happens to have because the data is synthetic</a:t>
+              <a:t>Every check so far, ARI in sections 2 and 3, used a ground truth this lesson happens to have because the data is synthetic</a:t>
             </a:r>
           </a:p>
           <a:p>
@@ -15424,7 +15424,7 @@
             </a:r>
             <a:r>
               <a:rPr/>
-              <a:t> outside answer key — computed from the clustering and the points alone</a:t>
+              <a:t> outside answer key: computed from the clustering and the points alone</a:t>
             </a:r>
           </a:p>
           <a:p>
@@ -15446,7 +15446,7 @@
             </a:r>
             <a:r>
               <a:rPr/>
-              <a:t>: usable, but weaker — only comparable across different k on the </a:t>
+              <a:t>: usable, but weaker, only comparable across different k on the </a:t>
             </a:r>
             <a:r>
               <a:rPr i="1"/>
@@ -15549,7 +15549,7 @@
             </a:r>
             <a:r>
               <a:rPr/>
-              <a:t> labelling assumed correct — ARI and its relatives</a:t>
+              <a:t> labelling assumed correct, ARI and its relatives</a:t>
             </a:r>
           </a:p>
           <a:p>
@@ -15579,7 +15579,7 @@
             <a:pPr lvl="0"/>
             <a:r>
               <a:rPr/>
-              <a:t>In practice: a hand-labelled sample, a business rule, or a downstream outcome — did the “bot” cluster get blocked and never return?</a:t>
+              <a:t>In practice: a hand-labelled sample, a business rule, or a downstream outcome: did the “bot” cluster get blocked and never return?</a:t>
             </a:r>
           </a:p>
           <a:p>
@@ -15685,7 +15685,7 @@
             </a:r>
             <a:r>
               <a:rPr/>
-              <a:t> — the shape it was given, not the assumption</a:t>
+              <a:t>: the shape it was given, not the assumption</a:t>
             </a:r>
           </a:p>
           <a:p>
@@ -15707,7 +15707,7 @@
             </a:r>
             <a:r>
               <a:rPr/>
-              <a:t>, not correctness — k-means always looks round by construction</a:t>
+              <a:t>, not correctness: k-means always looks round by construction</a:t>
             </a:r>
           </a:p>
         </p:txBody>
@@ -15877,7 +15877,7 @@
             </a:r>
             <a:r>
               <a:rPr/>
-              <a:t> — the first principal component</a:t>
+              <a:t>: the first principal component</a:t>
             </a:r>
           </a:p>
           <a:p>
@@ -15993,7 +15993,7 @@
             <a:pPr lvl="0"/>
             <a:r>
               <a:rPr/>
-              <a:t>Σ is the sample covariance matrix — diagonal 1, off-diagonal entries the correlations the previous figure showed as colours</a:t>
+              <a:t>Σ is the sample covariance matrix: diagonal 1, off-diagonal entries the correlations the previous figure showed as colours</a:t>
             </a:r>
           </a:p>
           <a:p>
@@ -16227,7 +16227,7 @@
             <a:pPr lvl="0"/>
             <a:r>
               <a:rPr/>
-              <a:t>Every dataset is synthetic — its truth is normally hidden</a:t>
+              <a:t>Every dataset is synthetic: its truth is normally hidden</a:t>
             </a:r>
           </a:p>
         </p:txBody>
@@ -16419,7 +16419,7 @@
             <a:pPr lvl="0"/>
             <a:r>
               <a:rPr/>
-              <a:t>Orthogonality is automatic — Σ is symmetric, by the spectral theorem</a:t>
+              <a:t>Orthogonality is automatic: Σ is symmetric, by the spectral theorem</a:t>
             </a:r>
           </a:p>
           <a:p>
@@ -16725,7 +16725,7 @@
             <a:pPr lvl="0"/>
             <a:r>
               <a:rPr/>
-              <a:t>Squaring a matrix squares its condition number — never form Xᵀ X explicitly</a:t>
+              <a:t>Squaring a matrix squares its condition number, never form Xᵀ X explicitly</a:t>
             </a:r>
           </a:p>
         </p:txBody>
@@ -16922,7 +16922,7 @@
             <a:pPr lvl="0"/>
             <a:r>
               <a:rPr/>
-              <a:t>On the 8-feature account table, all three agree to within 5 × 10⁻¹⁵ — floating-point rounding, and nothing more</a:t>
+              <a:t>On the 8-feature account table, all three agree to within 5 × 10⁻¹⁵: floating-point rounding, and nothing more</a:t>
             </a:r>
           </a:p>
         </p:txBody>
@@ -17542,7 +17542,7 @@
             <a:pPr lvl="0"/>
             <a:r>
               <a:rPr/>
-              <a:t>This dataset’s elbow is unusually clean — most real data will not present one this sharp</a:t>
+              <a:t>This dataset’s elbow is unusually clean: most real data will not present one this sharp</a:t>
             </a:r>
           </a:p>
           <a:p>
@@ -17665,7 +17665,7 @@
             <a:pPr lvl="0"/>
             <a:r>
               <a:rPr/>
-              <a:t>A 2-D PCA and t-SNE scatter of the same accounts — and why neither shows the anomalies as outliers</a:t>
+              <a:t>A 2-D PCA and t-SNE scatter of the same accounts, and why neither shows the anomalies as outliers</a:t>
             </a:r>
           </a:p>
         </p:txBody>
@@ -17776,7 +17776,7 @@
             <a:pPr lvl="0"/>
             <a:r>
               <a:rPr/>
-              <a:t>This lesson can check every method against a real answer — Aurora’s own analysts never could</a:t>
+              <a:t>This lesson can check every method against a real answer: Aurora’s own analysts never could</a:t>
             </a:r>
           </a:p>
           <a:p>
@@ -17889,7 +17889,7 @@
             <a:pPr lvl="0"/>
             <a:r>
               <a:rPr/>
-              <a:t>Excellent at making separate clusters visually obvious — often more so than PCA’s first two components</a:t>
+              <a:t>Excellent at making separate clusters visually obvious, often more so than PCA’s first two components</a:t>
             </a:r>
           </a:p>
           <a:p>
@@ -17988,7 +17988,7 @@
             </a:r>
             <a:r>
               <a:rPr/>
-              <a:t> minimum — 30 starts ranged WCSS 374.1 to 1,390.4</a:t>
+              <a:t> minimum: 30 starts ranged WCSS 374.1 to 1,390.4</a:t>
             </a:r>
           </a:p>
           <a:p>
@@ -18416,7 +18416,7 @@
             <a:pPr lvl="0"/>
             <a:r>
               <a:rPr/>
-              <a:t>rᵢj = 1 if point i is assigned to cluster j, else 0 — exactly one 1 per row</a:t>
+              <a:t>rᵢj = 1 if point i is assigned to cluster j, else 0: exactly one 1 per row</a:t>
             </a:r>
           </a:p>
           <a:p>

--- a/Lessons/08_unsupervised_learning/Slides/unsupervised_learning_slides.pptx
+++ b/Lessons/08_unsupervised_learning/Slides/unsupervised_learning_slides.pptx
@@ -6829,7 +6829,7 @@
             </a:pPr>
             <a:r>
               <a:rPr/>
-              <a:t>Ask them to write it down - the fourth lesson this course has produced one of these carry-home numbers: 77% accuracy on coin-flip labels, 98 of 128 imputed rows that borrowed from the test set, an overfit coefficient of 247,514, and now this.</a:t>
+              <a:t>Ask them to write it down - the fourth lesson this course has produced one of these carry-home numbers: 77% accuracy on coin-flip labels, 98 of 128 imputed rows that borrowed from the test set, a coefficient of 365 where an unpenalised fit wanted billions, and now this.</a:t>
             </a:r>
           </a:p>
           <a:p>

--- a/Lessons/08_unsupervised_learning/Slides/unsupervised_learning_slides.pptx
+++ b/Lessons/08_unsupervised_learning/Slides/unsupervised_learning_slides.pptx
@@ -11308,8 +11308,8 @@
         </p:blipFill>
         <p:spPr bwMode="auto">
           <a:xfrm>
-            <a:off x="457205" y="2401690"/>
-            <a:ext cx="8229590" cy="888999"/>
+            <a:off x="457200" y="2414389"/>
+            <a:ext cx="8229600" cy="863600"/>
           </a:xfrm>
           <a:prstGeom prst="rect">
             <a:avLst/>

--- a/Lessons/08_unsupervised_learning/Slides/unsupervised_learning_slides.pptx
+++ b/Lessons/08_unsupervised_learning/Slides/unsupervised_learning_slides.pptx
@@ -6829,7 +6829,7 @@
             </a:pPr>
             <a:r>
               <a:rPr/>
-              <a:t>Ask them to write it down - the fourth lesson this course has produced one of these carry-home numbers: 77% accuracy on coin-flip labels, 98 of 128 imputed rows that borrowed from the test set, a coefficient of 365 where an unpenalised fit wanted billions, and now this.</a:t>
+              <a:t>Ask them to write it down - the fourth lesson this course has produced one of these carry-home numbers: 77% accuracy on coin-flip labels, 94 of 128 imputed rows that borrowed from the test set, a coefficient of 365 where an unpenalised fit wanted billions, and now this.</a:t>
             </a:r>
           </a:p>
           <a:p>
@@ -11412,7 +11412,7 @@
             </a:r>
             <a:r>
               <a:rPr/>
-              <a:t>: worst case improves ~300 units</a:t>
+              <a:t>: the worst case gains ~300 units</a:t>
             </a:r>
           </a:p>
           <a:p>
@@ -11424,10 +11424,6 @@
             <a:r>
               <a:rPr b="1"/>
               <a:t>global optimum on the first attempt</a:t>
-            </a:r>
-            <a:r>
-              <a:rPr/>
-              <a:t>, default settings</a:t>
             </a:r>
           </a:p>
           <a:p>
@@ -11440,14 +11436,14 @@
             </a:r>
             <a:r>
               <a:rPr/>
-              <a:t> uses k-means++ plus 10 restarts, by default</a:t>
+              <a:t> uses k-means++ plus 10 restarts by default</a:t>
             </a:r>
           </a:p>
           <a:p>
             <a:pPr lvl="0"/>
             <a:r>
               <a:rPr/>
-              <a:t>Notebook 01’s from-scratch version matches it to within 10⁻⁴ of WCSS</a:t>
+              <a:t>Notebook 01 matches its WCSS to 10⁻⁴</a:t>
             </a:r>
           </a:p>
         </p:txBody>
@@ -12482,7 +12478,7 @@
             </a:r>
             <a:r>
               <a:rPr/>
-              <a:t>: scripted, behaviourally consistent</a:t>
+              <a:t>: scripted and consistent</a:t>
             </a:r>
           </a:p>
           <a:p>
@@ -12497,14 +12493,14 @@
             </a:r>
             <a:r>
               <a:rPr/>
-              <a:t>: bots a tight cloud, humans a diffuse ring around that same centre</a:t>
+              <a:t>: a tight cloud inside a diffuse ring</a:t>
             </a:r>
           </a:p>
           <a:p>
             <a:pPr lvl="0"/>
             <a:r>
               <a:rPr/>
-              <a:t>No straight cut separates them, because there are no two offset clouds</a:t>
+              <a:t>No straight cut separates them: there are no two offset clouds</a:t>
             </a:r>
           </a:p>
         </p:txBody>
@@ -13822,15 +13818,7 @@
             <a:pPr lvl="0"/>
             <a:r>
               <a:rPr/>
-              <a:t>A compact core </a:t>
-            </a:r>
-            <a:r>
-              <a:rPr b="1"/>
-              <a:t>and</a:t>
-            </a:r>
-            <a:r>
-              <a:rPr/>
-              <a:t>, separately, a diffuse ring both count: if dense enough at the scale </a:t>
+              <a:t>A compact core and a diffuse ring both count, if dense enough at the scale </a:t>
             </a:r>
             <a:r>
               <a:rPr>
@@ -15677,22 +15665,22 @@
             <a:pPr lvl="0"/>
             <a:r>
               <a:rPr/>
-              <a:t>It only endorses </a:t>
+              <a:t>It endorses only </a:t>
             </a:r>
             <a:r>
               <a:rPr b="1"/>
-              <a:t>relative to what the metric can see</a:t>
-            </a:r>
-            <a:r>
-              <a:rPr/>
-              <a:t>: the shape it was given, not the assumption</a:t>
+              <a:t>what the metric can see</a:t>
+            </a:r>
+            <a:r>
+              <a:rPr/>
+              <a:t>: the shape, not the assumption behind it</a:t>
             </a:r>
           </a:p>
           <a:p>
             <a:pPr lvl="0"/>
             <a:r>
               <a:rPr/>
-              <a:t>k-means on the bot/human data (ARI ≈ -0.046) still gets a positive, unremarkable score</a:t>
+              <a:t>k-means on the bot/human data (ARI ≈ -0.046) still scores positive</a:t>
             </a:r>
           </a:p>
           <a:p>
@@ -15707,7 +15695,7 @@
             </a:r>
             <a:r>
               <a:rPr/>
-              <a:t>, not correctness: k-means always looks round by construction</a:t>
+              <a:t>, not correctness, and k-means always looks round by construction</a:t>
             </a:r>
           </a:p>
         </p:txBody>
@@ -17542,28 +17530,28 @@
             <a:pPr lvl="0"/>
             <a:r>
               <a:rPr/>
-              <a:t>This dataset’s elbow is unusually clean: most real data will not present one this sharp</a:t>
+              <a:t>This dataset’s elbow is unusually clean; most real data is not</a:t>
             </a:r>
           </a:p>
           <a:p>
             <a:pPr lvl="0"/>
             <a:r>
               <a:rPr/>
-              <a:t>Common alternative: keep enough components to explain a chosen fraction of variance, typically 90–95%</a:t>
+              <a:t>Common alternative: keep enough components for a chosen fraction of the variance, typically 90–95%</a:t>
             </a:r>
           </a:p>
           <a:p>
             <a:pPr lvl="0"/>
             <a:r>
               <a:rPr/>
-              <a:t>Or: treat the number of components as a hyperparameter, and let cross-validated downstream performance decide</a:t>
+              <a:t>Or treat the number of components as a hyperparameter, and let cross-validation decide</a:t>
             </a:r>
           </a:p>
           <a:p>
             <a:pPr lvl="0"/>
             <a:r>
               <a:rPr/>
-              <a:t>The scree plot is a starting point for judgement, not a rule that automates itself</a:t>
+              <a:t>The scree plot starts the judgement; it does not automate it</a:t>
             </a:r>
           </a:p>
         </p:txBody>
@@ -17867,7 +17855,7 @@
             </a:r>
             <a:r>
               <a:rPr/>
-              <a:t> (t-distributed stochastic neighbour embedding): arranges points so those close together </a:t>
+              <a:t> (t-distributed stochastic neighbour embedding) arranges points so those close together </a:t>
             </a:r>
             <a:r>
               <a:rPr b="1"/>
@@ -17875,14 +17863,14 @@
             </a:r>
             <a:r>
               <a:rPr/>
-              <a:t> close in the picture</a:t>
+              <a:t> close</a:t>
             </a:r>
           </a:p>
           <a:p>
             <a:pPr lvl="0"/>
             <a:r>
               <a:rPr/>
-              <a:t>No commitment to preserving distances between points that started far apart</a:t>
+              <a:t>Distances between points that started far apart are not preserved</a:t>
             </a:r>
           </a:p>
           <a:p>
@@ -17896,11 +17884,7 @@
             <a:pPr lvl="0"/>
             <a:r>
               <a:rPr b="1"/>
-              <a:t>Distances between clusters are not meaningful</a:t>
-            </a:r>
-            <a:r>
-              <a:rPr/>
-              <a:t>; no fixed transform for a new point</a:t>
+              <a:t>Distances between clusters mean nothing</a:t>
             </a:r>
           </a:p>
         </p:txBody>
@@ -18295,14 +18279,14 @@
             </a:r>
             <a:r>
               <a:rPr/>
-              <a:t> turns “close” into a number, and searches for the grouping that minimises the total</a:t>
+              <a:t> turns “close” into a number and minimises the total</a:t>
             </a:r>
           </a:p>
           <a:p>
             <a:pPr lvl="0"/>
             <a:r>
               <a:rPr/>
-              <a:t>Searched for jointly: every point’s </a:t>
+              <a:t>Two things are searched for jointly: every point’s </a:t>
             </a:r>
             <a:r>
               <a:rPr b="1"/>
@@ -18321,7 +18305,7 @@
             <a:pPr lvl="0"/>
             <a:r>
               <a:rPr/>
-              <a:t>Searching both at once is hard; the trick is minimising each one separately, holding the other fixed</a:t>
+              <a:t>Both at once is hard; the trick is minimising each separately, holding the other fixed</a:t>
             </a:r>
           </a:p>
         </p:txBody>

--- a/Lessons/08_unsupervised_learning/Slides/unsupervised_learning_slides.pptx
+++ b/Lessons/08_unsupervised_learning/Slides/unsupervised_learning_slides.pptx
@@ -5369,7 +5369,7 @@
             </a:pPr>
             <a:r>
               <a:rPr/>
-              <a:t>Substituting back gives vᵀ Σ v = λ - the variance a direction captures </a:t>
+              <a:t>Substituting back gives vᵀΣv = λ - the variance a direction captures </a:t>
             </a:r>
             <a:r>
               <a:rPr b="1"/>
@@ -5687,7 +5687,7 @@
             </a:pPr>
             <a:r>
               <a:rPr/>
-              <a:t>Two standardised features from section 2 - spend and visit frequency. For this symmetric 2×2 form, the eigenvalues are exactly 1+r and 1-r for correlation r, checkable directly from Σ v = λ v with no numerical solver - with r = 0.171: 1.171 and 0.829, matching </a:t>
+              <a:t>Two standardised features from section 2 - spend and visit frequency. For this symmetric 2×2 form, the eigenvalues are exactly 1+r and 1-r for correlation r, checkable directly from Σv = λv with no numerical solver - with r = 0.171: 1.171 and 0.829, matching </a:t>
             </a:r>
             <a:r>
               <a:rPr>
@@ -5917,7 +5917,7 @@
             </a:pPr>
             <a:r>
               <a:rPr/>
-              <a:t>Say what the equation means: U and V orthogonal, S diagonal with non-negative singular values s₁ ≥ s₂ ≥ …; the columns of V are exactly the eigenvectors of Xᵀ X, and λᵢ = sᵢ²/(m-1) recovers the eigenvalues without ever forming Σ.</a:t>
+              <a:t>Say what the equation means: U and V orthogonal, S diagonal with non-negative singular values s₁ ≥ s₂ ≥ …; the columns of V are exactly the eigenvectors of XᵀX, and λᵢ = sᵢ²/(m-1) recovers the eigenvalues without ever forming Σ.</a:t>
             </a:r>
           </a:p>
           <a:p>
@@ -16377,7 +16377,7 @@
             <a:pPr lvl="0"/>
             <a:r>
               <a:rPr/>
-              <a:t>Substituting Σ v = λ v back: vᵀ Σ v = λ</a:t>
+              <a:t>Substituting Σv = λv back: vᵀΣv = λ</a:t>
             </a:r>
           </a:p>
           <a:p>
@@ -16713,7 +16713,7 @@
             <a:pPr lvl="0"/>
             <a:r>
               <a:rPr/>
-              <a:t>Squaring a matrix squares its condition number, never form Xᵀ X explicitly</a:t>
+              <a:t>Squaring a matrix squares its condition number, never form XᵀX explicitly</a:t>
             </a:r>
           </a:p>
         </p:txBody>

--- a/Lessons/08_unsupervised_learning/Slides/unsupervised_learning_slides.pptx
+++ b/Lessons/08_unsupervised_learning/Slides/unsupervised_learning_slides.pptx
@@ -7167,7 +7167,7 @@
             </a:r>
             <a:r>
               <a:rPr/>
-              <a:t> the assignment of every point at once, and rᵢj is just bookkeeping for which point goes where - 1 if point i is in cluster j, 0 otherwise, exactly one 1 per row.</a:t>
+              <a:t> the assignment of every point at once, and rᵢⱼ is just bookkeeping for which point goes where - 1 if point i is in cluster j, 0 otherwise, exactly one 1 per row.</a:t>
             </a:r>
           </a:p>
           <a:p>
@@ -18385,7 +18385,7 @@
             <a:pPr lvl="0"/>
             <a:r>
               <a:rPr/>
-              <a:t>Minimise, jointly, over the cluster centres μj </a:t>
+              <a:t>Minimise, jointly, over the cluster centres μⱼ </a:t>
             </a:r>
             <a:r>
               <a:rPr b="1"/>
@@ -18393,14 +18393,14 @@
             </a:r>
             <a:r>
               <a:rPr/>
-              <a:t> every assignment rᵢj</a:t>
+              <a:t> every assignment rᵢⱼ</a:t>
             </a:r>
           </a:p>
           <a:p>
             <a:pPr lvl="0"/>
             <a:r>
               <a:rPr/>
-              <a:t>rᵢj = 1 if point i is assigned to cluster j, else 0: exactly one 1 per row</a:t>
+              <a:t>rᵢⱼ = 1 if point i is assigned to cluster j, else 0: exactly one 1 per row</a:t>
             </a:r>
           </a:p>
           <a:p>

--- a/Lessons/08_unsupervised_learning/Slides/unsupervised_learning_slides.pptx
+++ b/Lessons/08_unsupervised_learning/Slides/unsupervised_learning_slides.pptx
@@ -17877,7 +17877,7 @@
             <a:pPr lvl="0"/>
             <a:r>
               <a:rPr/>
-              <a:t>Excellent at making separate clusters visually obvious, often more so than PCA’s first two components</a:t>
+              <a:t>Excellent at making separate clusters visually obvious, more so than PCA’s first two components</a:t>
             </a:r>
           </a:p>
           <a:p>

--- a/Lessons/08_unsupervised_learning/Slides/unsupervised_learning_slides.pptx
+++ b/Lessons/08_unsupervised_learning/Slides/unsupervised_learning_slides.pptx
@@ -6939,7 +6939,7 @@
             </a:pPr>
             <a:r>
               <a:rPr/>
-              <a:t>Set it explicitly and say the deadline out loud: Friday 20 November, 23:59.</a:t>
+              <a:t>Set it explicitly and say the deadline out loud: Friday 20 November, 09:00, as lesson 9 begins.</a:t>
             </a:r>
           </a:p>
           <a:p>
@@ -18097,7 +18097,7 @@
             </a:r>
             <a:r>
               <a:rPr b="1"/>
-              <a:t>Friday 20 November 2026, 23:59</a:t>
+              <a:t>Friday 20 November 2026, 09:00</a:t>
             </a:r>
           </a:p>
           <a:p>

--- a/Lessons/08_unsupervised_learning/Slides/unsupervised_learning_slides.pptx
+++ b/Lessons/08_unsupervised_learning/Slides/unsupervised_learning_slides.pptx
@@ -1797,7 +1797,7 @@
             </a:pPr>
             <a:r>
               <a:rPr/>
-              <a:t>Hand back exercise 7 briefly. A sentence on what went well, a sentence on the recurring gap - several reports read the random forest’s importance ranking as settled fact rather than as something section 7 of that lesson showed could be dominated by noise columns.</a:t>
+              <a:t>Nothing to collect and nothing to hand back - discuss it. Ask what the importance ranking was taken to mean, and listen for the gap: reading it as settled fact rather than as something section 7 of that lesson showed could be dominated by noise columns.</a:t>
             </a:r>
           </a:p>
           <a:p>
@@ -6939,7 +6939,7 @@
             </a:pPr>
             <a:r>
               <a:rPr/>
-              <a:t>Set it explicitly and say the deadline out loud: Friday 20 November, 09:00, as lesson 9 begins.</a:t>
+              <a:t>Set it explicitly and say out loud when it comes back: the first ten minutes of lesson 9, Friday 20 November.</a:t>
             </a:r>
           </a:p>
           <a:p>
@@ -13009,7 +13009,7 @@
             </a:pPr>
             <a:r>
               <a:rPr/>
-              <a:t>Exercise 7 returned</a:t>
+              <a:t>Exercise 7, before we start</a:t>
             </a:r>
           </a:p>
         </p:txBody>
@@ -13037,7 +13037,7 @@
             <a:pPr lvl="0"/>
             <a:r>
               <a:rPr/>
-              <a:t>Marks were for the </a:t>
+              <a:t>What counts is the </a:t>
             </a:r>
             <a:r>
               <a:rPr b="1"/>
@@ -13052,7 +13052,7 @@
             <a:pPr lvl="0"/>
             <a:r>
               <a:rPr/>
-              <a:t>Recurring gap: a feature-importance ranking quoted without checking how many candidate columns competed for attention at each split</a:t>
+              <a:t>The gap to watch for: a feature-importance ranking quoted without checking how many candidate columns competed for attention at each split</a:t>
             </a:r>
           </a:p>
           <a:p>
@@ -18093,11 +18093,11 @@
             </a:r>
             <a:r>
               <a:rPr/>
-              <a:t>, due </a:t>
+              <a:t>, discussed at the start of </a:t>
             </a:r>
             <a:r>
               <a:rPr b="1"/>
-              <a:t>Friday 20 November 2026, 09:00</a:t>
+              <a:t>Friday 20 November</a:t>
             </a:r>
           </a:p>
           <a:p>

--- a/Lessons/08_unsupervised_learning/Slides/unsupervised_learning_slides.pptx
+++ b/Lessons/08_unsupervised_learning/Slides/unsupervised_learning_slides.pptx
@@ -10503,8 +10503,8 @@
         </p:blipFill>
         <p:spPr bwMode="auto">
           <a:xfrm>
-            <a:off x="457200" y="1576189"/>
-            <a:ext cx="8229600" cy="2540000"/>
+            <a:off x="950667" y="1767613"/>
+            <a:ext cx="7242665" cy="2157152"/>
           </a:xfrm>
           <a:prstGeom prst="rect">
             <a:avLst/>
@@ -10830,7 +10830,7 @@
           </p:nvPr>
         </p:nvGraphicFramePr>
         <p:xfrm>
-          <a:off x="457200" y="1193800"/>
+          <a:off x="457200" y="1166099"/>
           <a:ext cx="8229600" cy="3390900"/>
         </p:xfrm>
         <a:graphic>
@@ -11308,8 +11308,8 @@
         </p:blipFill>
         <p:spPr bwMode="auto">
           <a:xfrm>
-            <a:off x="457200" y="2414389"/>
-            <a:ext cx="8229600" cy="863600"/>
+            <a:off x="457200" y="2439789"/>
+            <a:ext cx="8229600" cy="812800"/>
           </a:xfrm>
           <a:prstGeom prst="rect">
             <a:avLst/>
@@ -11739,8 +11739,8 @@
         </p:blipFill>
         <p:spPr bwMode="auto">
           <a:xfrm>
-            <a:off x="457200" y="2154039"/>
-            <a:ext cx="8229600" cy="1384300"/>
+            <a:off x="841749" y="2270533"/>
+            <a:ext cx="7460501" cy="1151312"/>
           </a:xfrm>
           <a:prstGeom prst="rect">
             <a:avLst/>
@@ -13209,7 +13209,7 @@
           </p:nvPr>
         </p:nvGraphicFramePr>
         <p:xfrm>
-          <a:off x="457200" y="1193800"/>
+          <a:off x="457200" y="1166099"/>
           <a:ext cx="8229600" cy="3390900"/>
         </p:xfrm>
         <a:graphic>
@@ -14112,7 +14112,7 @@
           </p:nvPr>
         </p:nvGraphicFramePr>
         <p:xfrm>
-          <a:off x="457200" y="1193800"/>
+          <a:off x="457200" y="1166099"/>
           <a:ext cx="8229600" cy="3390900"/>
         </p:xfrm>
         <a:graphic>
@@ -14408,7 +14408,7 @@
           </p:nvPr>
         </p:nvGraphicFramePr>
         <p:xfrm>
-          <a:off x="457200" y="1193800"/>
+          <a:off x="457200" y="1166099"/>
           <a:ext cx="8229600" cy="3390900"/>
         </p:xfrm>
         <a:graphic>
@@ -14952,7 +14952,7 @@
           </p:nvPr>
         </p:nvGraphicFramePr>
         <p:xfrm>
-          <a:off x="457200" y="1193800"/>
+          <a:off x="457200" y="1166099"/>
           <a:ext cx="8229600" cy="3390900"/>
         </p:xfrm>
         <a:graphic>
@@ -16061,8 +16061,8 @@
         </p:blipFill>
         <p:spPr bwMode="auto">
           <a:xfrm>
-            <a:off x="457200" y="2452489"/>
-            <a:ext cx="8229600" cy="787400"/>
+            <a:off x="457200" y="2496939"/>
+            <a:ext cx="8229600" cy="698500"/>
           </a:xfrm>
           <a:prstGeom prst="rect">
             <a:avLst/>
@@ -16288,8 +16288,8 @@
         </p:blipFill>
         <p:spPr bwMode="auto">
           <a:xfrm>
-            <a:off x="457200" y="1461889"/>
-            <a:ext cx="8229600" cy="2768600"/>
+            <a:off x="3225339" y="2436788"/>
+            <a:ext cx="2693321" cy="818803"/>
           </a:xfrm>
           <a:prstGeom prst="rect">
             <a:avLst/>
@@ -16482,7 +16482,7 @@
           </p:nvPr>
         </p:nvGraphicFramePr>
         <p:xfrm>
-          <a:off x="457200" y="1193800"/>
+          <a:off x="457200" y="1166099"/>
           <a:ext cx="8229600" cy="3390900"/>
         </p:xfrm>
         <a:graphic>
@@ -16786,8 +16786,8 @@
         </p:blipFill>
         <p:spPr bwMode="auto">
           <a:xfrm>
-            <a:off x="457200" y="2173089"/>
-            <a:ext cx="8229600" cy="1346200"/>
+            <a:off x="457200" y="2223889"/>
+            <a:ext cx="8229600" cy="1244600"/>
           </a:xfrm>
           <a:prstGeom prst="rect">
             <a:avLst/>
@@ -17060,7 +17060,7 @@
           </p:nvPr>
         </p:nvGraphicFramePr>
         <p:xfrm>
-          <a:off x="457200" y="1193800"/>
+          <a:off x="457200" y="1166099"/>
           <a:ext cx="8229600" cy="3390900"/>
         </p:xfrm>
         <a:graphic>

--- a/Lessons/08_unsupervised_learning/Slides/unsupervised_learning_slides.pptx
+++ b/Lessons/08_unsupervised_learning/Slides/unsupervised_learning_slides.pptx
@@ -10503,8 +10503,8 @@
         </p:blipFill>
         <p:spPr bwMode="auto">
           <a:xfrm>
-            <a:off x="950667" y="1767613"/>
-            <a:ext cx="7242665" cy="2157152"/>
+            <a:off x="922756" y="1759300"/>
+            <a:ext cx="7298487" cy="2173778"/>
           </a:xfrm>
           <a:prstGeom prst="rect">
             <a:avLst/>
@@ -11308,8 +11308,8 @@
         </p:blipFill>
         <p:spPr bwMode="auto">
           <a:xfrm>
-            <a:off x="457200" y="2439789"/>
-            <a:ext cx="8229600" cy="812800"/>
+            <a:off x="457200" y="2420739"/>
+            <a:ext cx="8229600" cy="850900"/>
           </a:xfrm>
           <a:prstGeom prst="rect">
             <a:avLst/>
@@ -11739,8 +11739,8 @@
         </p:blipFill>
         <p:spPr bwMode="auto">
           <a:xfrm>
-            <a:off x="841749" y="2270533"/>
-            <a:ext cx="7460501" cy="1151312"/>
+            <a:off x="871716" y="2212344"/>
+            <a:ext cx="7400568" cy="1267690"/>
           </a:xfrm>
           <a:prstGeom prst="rect">
             <a:avLst/>
@@ -16061,8 +16061,8 @@
         </p:blipFill>
         <p:spPr bwMode="auto">
           <a:xfrm>
-            <a:off x="457200" y="2496939"/>
-            <a:ext cx="8229600" cy="698500"/>
+            <a:off x="457200" y="2477889"/>
+            <a:ext cx="8229600" cy="736600"/>
           </a:xfrm>
           <a:prstGeom prst="rect">
             <a:avLst/>
@@ -16288,8 +16288,8 @@
         </p:blipFill>
         <p:spPr bwMode="auto">
           <a:xfrm>
-            <a:off x="3225339" y="2436788"/>
-            <a:ext cx="2693321" cy="818803"/>
+            <a:off x="3218289" y="2447179"/>
+            <a:ext cx="2707422" cy="798021"/>
           </a:xfrm>
           <a:prstGeom prst="rect">
             <a:avLst/>
@@ -16786,8 +16786,8 @@
         </p:blipFill>
         <p:spPr bwMode="auto">
           <a:xfrm>
-            <a:off x="457200" y="2223889"/>
-            <a:ext cx="8229600" cy="1244600"/>
+            <a:off x="457200" y="2198489"/>
+            <a:ext cx="8229599" cy="1295400"/>
           </a:xfrm>
           <a:prstGeom prst="rect">
             <a:avLst/>

--- a/Lessons/08_unsupervised_learning/Slides/unsupervised_learning_slides.pptx
+++ b/Lessons/08_unsupervised_learning/Slides/unsupervised_learning_slides.pptx
@@ -10489,7 +10489,7 @@
       </p:sp>
       <p:pic>
         <p:nvPicPr>
-          <p:cNvPr descr="eq_90b5944a0b.png" id="0" name="Picture 1"/>
+          <p:cNvPr descr="eq_9039889c92.png" id="0" name="Picture 1"/>
           <p:cNvPicPr>
             <a:picLocks noGrp="1" noChangeAspect="1"/>
           </p:cNvPicPr>
@@ -10503,8 +10503,8 @@
         </p:blipFill>
         <p:spPr bwMode="auto">
           <a:xfrm>
-            <a:off x="922756" y="1759300"/>
-            <a:ext cx="7298487" cy="2173778"/>
+            <a:off x="805668" y="1759300"/>
+            <a:ext cx="7532663" cy="2173778"/>
           </a:xfrm>
           <a:prstGeom prst="rect">
             <a:avLst/>

--- a/Lessons/08_unsupervised_learning/Slides/unsupervised_learning_slides.pptx
+++ b/Lessons/08_unsupervised_learning/Slides/unsupervised_learning_slides.pptx
@@ -1145,6 +1145,20 @@
         <p:txBody>
           <a:bodyPr/>
           <a:lstStyle/>
+          <a:p>
+            <a:pPr lvl="0" indent="0" marL="0">
+              <a:buNone/>
+            </a:pPr>
+            <a:r>
+              <a:rPr/>
+              <a:t>Define d before reading the formula, since it is no longer beside it: d(x_i) is the distance from x_i to the NEAREST centre already chosen, not to all of them. The two formulas side by side came out at 25pt, which needs the front row.</a:t>
+            </a:r>
+          </a:p>
+          <a:p>
+            <a:pPr lvl="0" indent="0" marL="0">
+              <a:buNone/>
+            </a:pPr>
+          </a:p>
           <a:p>
             <a:pPr lvl="0" indent="0" marL="0">
               <a:buNone/>
@@ -11294,7 +11308,7 @@
       </p:sp>
       <p:pic>
         <p:nvPicPr>
-          <p:cNvPr descr="eq_f73bedc874.png" id="0" name="Picture 1"/>
+          <p:cNvPr descr="eq_4681416550.png" id="0" name="Picture 1"/>
           <p:cNvPicPr>
             <a:picLocks noGrp="1" noChangeAspect="1"/>
           </p:cNvPicPr>
@@ -11308,8 +11322,8 @@
         </p:blipFill>
         <p:spPr bwMode="auto">
           <a:xfrm>
-            <a:off x="457200" y="2420739"/>
-            <a:ext cx="8229600" cy="850900"/>
+            <a:off x="457200" y="1988939"/>
+            <a:ext cx="8229600" cy="1714500"/>
           </a:xfrm>
           <a:prstGeom prst="rect">
             <a:avLst/>
